--- a/public/fun/pack/pptx/family/가족소개_16_우리부부_평상수박.pptx
+++ b/public/fun/pack/pptx/family/가족소개_16_우리부부_평상수박.pptx
@@ -3347,7 +3347,7 @@
             <a:r>
               <a:rPr sz="3600" b="1" i="0">
                 <a:solidFill>
-                  <a:srgbClr val="153C26"/>
+                  <a:srgbClr val="115F59"/>
                 </a:solidFill>
               </a:rPr>
               <a:t>우리 가족을 소개합니다</a:t>
@@ -3385,7 +3385,7 @@
             <a:r>
               <a:rPr sz="1700" b="0" i="1">
                 <a:solidFill>
-                  <a:srgbClr val="153C26"/>
+                  <a:srgbClr val="115F59"/>
                 </a:solidFill>
               </a:rPr>
               <a:t>평상에 앉아 수박 나눠 먹던 밤</a:t>
@@ -3445,7 +3445,7 @@
     <p:bg>
       <p:bgPr>
         <a:solidFill>
-          <a:srgbClr val="F0FAF4"/>
+          <a:srgbClr val="EEFCFB"/>
         </a:solidFill>
         <a:effectLst/>
       </p:bgPr>
@@ -3474,7 +3474,7 @@
           <a:noFill/>
           <a:ln w="28575">
             <a:solidFill>
-              <a:srgbClr val="308854"/>
+              <a:srgbClr val="26C5B8"/>
             </a:solidFill>
           </a:ln>
         </p:spPr>
@@ -3503,7 +3503,7 @@
           <a:noFill/>
           <a:ln w="9525">
             <a:solidFill>
-              <a:srgbClr val="D0F1DE"/>
+              <a:srgbClr val="D1FAF7"/>
             </a:solidFill>
           </a:ln>
         </p:spPr>
@@ -3545,7 +3545,7 @@
             <a:r>
               <a:rPr sz="3000" b="1" i="0">
                 <a:solidFill>
-                  <a:srgbClr val="153C26"/>
+                  <a:srgbClr val="115F59"/>
                 </a:solidFill>
               </a:rPr>
               <a:t>가족 구성원</a:t>
@@ -3568,11 +3568,11 @@
             <a:avLst/>
           </a:prstGeom>
           <a:solidFill>
-            <a:srgbClr val="D0F1DE"/>
+            <a:srgbClr val="D1FAF7"/>
           </a:solidFill>
           <a:ln w="19050">
             <a:solidFill>
-              <a:srgbClr val="308854"/>
+              <a:srgbClr val="26C5B8"/>
             </a:solidFill>
             <a:prstDash val="dash"/>
           </a:ln>
@@ -3591,7 +3591,7 @@
             <a:r>
               <a:rPr sz="1200" b="0" i="0">
                 <a:solidFill>
-                  <a:srgbClr val="153C26"/>
+                  <a:srgbClr val="115F59"/>
                 </a:solidFill>
               </a:rPr>
               <a:t>사진</a:t>
@@ -3629,7 +3629,7 @@
             <a:r>
               <a:rPr sz="1600" b="1" i="0">
                 <a:solidFill>
-                  <a:srgbClr val="153C26"/>
+                  <a:srgbClr val="115F59"/>
                 </a:solidFill>
               </a:rPr>
               <a:t>남편</a:t>
@@ -3720,11 +3720,11 @@
             <a:avLst/>
           </a:prstGeom>
           <a:solidFill>
-            <a:srgbClr val="D0F1DE"/>
+            <a:srgbClr val="D1FAF7"/>
           </a:solidFill>
           <a:ln w="19050">
             <a:solidFill>
-              <a:srgbClr val="308854"/>
+              <a:srgbClr val="26C5B8"/>
             </a:solidFill>
             <a:prstDash val="dash"/>
           </a:ln>
@@ -3743,7 +3743,7 @@
             <a:r>
               <a:rPr sz="1200" b="0" i="0">
                 <a:solidFill>
-                  <a:srgbClr val="153C26"/>
+                  <a:srgbClr val="115F59"/>
                 </a:solidFill>
               </a:rPr>
               <a:t>사진</a:t>
@@ -3781,7 +3781,7 @@
             <a:r>
               <a:rPr sz="1600" b="1" i="0">
                 <a:solidFill>
-                  <a:srgbClr val="153C26"/>
+                  <a:srgbClr val="115F59"/>
                 </a:solidFill>
               </a:rPr>
               <a:t>아내</a:t>
@@ -3871,7 +3871,7 @@
     <p:bg>
       <p:bgPr>
         <a:solidFill>
-          <a:srgbClr val="F0FAF4"/>
+          <a:srgbClr val="EEFCFB"/>
         </a:solidFill>
         <a:effectLst/>
       </p:bgPr>
@@ -3900,7 +3900,7 @@
           <a:noFill/>
           <a:ln w="28575">
             <a:solidFill>
-              <a:srgbClr val="308854"/>
+              <a:srgbClr val="26C5B8"/>
             </a:solidFill>
           </a:ln>
         </p:spPr>
@@ -3929,7 +3929,7 @@
           <a:noFill/>
           <a:ln w="9525">
             <a:solidFill>
-              <a:srgbClr val="D0F1DE"/>
+              <a:srgbClr val="D1FAF7"/>
             </a:solidFill>
           </a:ln>
         </p:spPr>
@@ -3971,7 +3971,7 @@
             <a:r>
               <a:rPr sz="3000" b="1" i="0">
                 <a:solidFill>
-                  <a:srgbClr val="153C26"/>
+                  <a:srgbClr val="115F59"/>
                 </a:solidFill>
               </a:rPr>
               <a:t>우리 가족 이야기</a:t>
@@ -3994,7 +3994,7 @@
             <a:avLst/>
           </a:prstGeom>
           <a:solidFill>
-            <a:srgbClr val="D0F1DE"/>
+            <a:srgbClr val="D1FAF7"/>
           </a:solidFill>
           <a:ln>
             <a:noFill/>
@@ -4023,7 +4023,7 @@
             <a:avLst/>
           </a:prstGeom>
           <a:solidFill>
-            <a:srgbClr val="308854"/>
+            <a:srgbClr val="26C5B8"/>
           </a:solidFill>
           <a:ln w="38100">
             <a:solidFill>
@@ -4069,7 +4069,7 @@
             <a:r>
               <a:rPr sz="1600" b="1" i="0">
                 <a:solidFill>
-                  <a:srgbClr val="308854"/>
+                  <a:srgbClr val="26C5B8"/>
                 </a:solidFill>
               </a:rPr>
               <a:t>처음 만난 날</a:t>
@@ -4107,7 +4107,7 @@
             <a:r>
               <a:rPr sz="1800" b="1" i="0">
                 <a:solidFill>
-                  <a:srgbClr val="153C26"/>
+                  <a:srgbClr val="115F59"/>
                 </a:solidFill>
               </a:rPr>
               <a:t>첫 만남</a:t>
@@ -4168,7 +4168,7 @@
             <a:avLst/>
           </a:prstGeom>
           <a:solidFill>
-            <a:srgbClr val="308854"/>
+            <a:srgbClr val="26C5B8"/>
           </a:solidFill>
           <a:ln w="38100">
             <a:solidFill>
@@ -4214,7 +4214,7 @@
             <a:r>
               <a:rPr sz="1600" b="1" i="0">
                 <a:solidFill>
-                  <a:srgbClr val="308854"/>
+                  <a:srgbClr val="26C5B8"/>
                 </a:solidFill>
               </a:rPr>
               <a:t>결혼</a:t>
@@ -4252,7 +4252,7 @@
             <a:r>
               <a:rPr sz="1800" b="1" i="0">
                 <a:solidFill>
-                  <a:srgbClr val="153C26"/>
+                  <a:srgbClr val="115F59"/>
                 </a:solidFill>
               </a:rPr>
               <a:t>함께 시작한 날</a:t>
@@ -4313,7 +4313,7 @@
             <a:avLst/>
           </a:prstGeom>
           <a:solidFill>
-            <a:srgbClr val="308854"/>
+            <a:srgbClr val="26C5B8"/>
           </a:solidFill>
           <a:ln w="38100">
             <a:solidFill>
@@ -4359,7 +4359,7 @@
             <a:r>
               <a:rPr sz="1600" b="1" i="0">
                 <a:solidFill>
-                  <a:srgbClr val="308854"/>
+                  <a:srgbClr val="26C5B8"/>
                 </a:solidFill>
               </a:rPr>
               <a:t>첫 집</a:t>
@@ -4397,7 +4397,7 @@
             <a:r>
               <a:rPr sz="1800" b="1" i="0">
                 <a:solidFill>
-                  <a:srgbClr val="153C26"/>
+                  <a:srgbClr val="115F59"/>
                 </a:solidFill>
               </a:rPr>
               <a:t>우리의 보금자리</a:t>
@@ -4458,7 +4458,7 @@
             <a:avLst/>
           </a:prstGeom>
           <a:solidFill>
-            <a:srgbClr val="308854"/>
+            <a:srgbClr val="26C5B8"/>
           </a:solidFill>
           <a:ln w="38100">
             <a:solidFill>
@@ -4504,7 +4504,7 @@
             <a:r>
               <a:rPr sz="1600" b="1" i="0">
                 <a:solidFill>
-                  <a:srgbClr val="308854"/>
+                  <a:srgbClr val="26C5B8"/>
                 </a:solidFill>
               </a:rPr>
               <a:t>지금</a:t>
@@ -4542,7 +4542,7 @@
             <a:r>
               <a:rPr sz="1800" b="1" i="0">
                 <a:solidFill>
-                  <a:srgbClr val="153C26"/>
+                  <a:srgbClr val="115F59"/>
                 </a:solidFill>
               </a:rPr>
               <a:t>오늘의 우리</a:t>
@@ -4602,7 +4602,7 @@
     <p:bg>
       <p:bgPr>
         <a:solidFill>
-          <a:srgbClr val="F0FAF4"/>
+          <a:srgbClr val="EEFCFB"/>
         </a:solidFill>
         <a:effectLst/>
       </p:bgPr>
@@ -4631,7 +4631,7 @@
           <a:noFill/>
           <a:ln w="28575">
             <a:solidFill>
-              <a:srgbClr val="308854"/>
+              <a:srgbClr val="26C5B8"/>
             </a:solidFill>
           </a:ln>
         </p:spPr>
@@ -4660,7 +4660,7 @@
           <a:noFill/>
           <a:ln w="9525">
             <a:solidFill>
-              <a:srgbClr val="D0F1DE"/>
+              <a:srgbClr val="D1FAF7"/>
             </a:solidFill>
           </a:ln>
         </p:spPr>
@@ -4702,7 +4702,7 @@
             <a:r>
               <a:rPr sz="3000" b="1" i="0">
                 <a:solidFill>
-                  <a:srgbClr val="153C26"/>
+                  <a:srgbClr val="115F59"/>
                 </a:solidFill>
               </a:rPr>
               <a:t>우리 가족의 약속</a:t>
@@ -4727,11 +4727,11 @@
             </a:avLst>
           </a:prstGeom>
           <a:solidFill>
-            <a:srgbClr val="F0FAF4"/>
+            <a:srgbClr val="EEFCFB"/>
           </a:solidFill>
           <a:ln w="12700">
             <a:solidFill>
-              <a:srgbClr val="D0F1DE"/>
+              <a:srgbClr val="D1FAF7"/>
             </a:solidFill>
           </a:ln>
         </p:spPr>
@@ -4758,7 +4758,7 @@
             <a:avLst/>
           </a:prstGeom>
           <a:solidFill>
-            <a:srgbClr val="308854"/>
+            <a:srgbClr val="26C5B8"/>
           </a:solidFill>
           <a:ln>
             <a:noFill/>
@@ -4816,7 +4816,7 @@
             <a:r>
               <a:rPr sz="1800" b="1" i="0">
                 <a:solidFill>
-                  <a:srgbClr val="153C26"/>
+                  <a:srgbClr val="115F59"/>
                 </a:solidFill>
               </a:rPr>
               <a:t>약속 1</a:t>
@@ -4879,11 +4879,11 @@
             </a:avLst>
           </a:prstGeom>
           <a:solidFill>
-            <a:srgbClr val="F0FAF4"/>
+            <a:srgbClr val="EEFCFB"/>
           </a:solidFill>
           <a:ln w="12700">
             <a:solidFill>
-              <a:srgbClr val="D0F1DE"/>
+              <a:srgbClr val="D1FAF7"/>
             </a:solidFill>
           </a:ln>
         </p:spPr>
@@ -4910,7 +4910,7 @@
             <a:avLst/>
           </a:prstGeom>
           <a:solidFill>
-            <a:srgbClr val="308854"/>
+            <a:srgbClr val="26C5B8"/>
           </a:solidFill>
           <a:ln>
             <a:noFill/>
@@ -4968,7 +4968,7 @@
             <a:r>
               <a:rPr sz="1800" b="1" i="0">
                 <a:solidFill>
-                  <a:srgbClr val="153C26"/>
+                  <a:srgbClr val="115F59"/>
                 </a:solidFill>
               </a:rPr>
               <a:t>약속 2</a:t>
@@ -5031,11 +5031,11 @@
             </a:avLst>
           </a:prstGeom>
           <a:solidFill>
-            <a:srgbClr val="F0FAF4"/>
+            <a:srgbClr val="EEFCFB"/>
           </a:solidFill>
           <a:ln w="12700">
             <a:solidFill>
-              <a:srgbClr val="D0F1DE"/>
+              <a:srgbClr val="D1FAF7"/>
             </a:solidFill>
           </a:ln>
         </p:spPr>
@@ -5062,7 +5062,7 @@
             <a:avLst/>
           </a:prstGeom>
           <a:solidFill>
-            <a:srgbClr val="308854"/>
+            <a:srgbClr val="26C5B8"/>
           </a:solidFill>
           <a:ln>
             <a:noFill/>
@@ -5120,7 +5120,7 @@
             <a:r>
               <a:rPr sz="1800" b="1" i="0">
                 <a:solidFill>
-                  <a:srgbClr val="153C26"/>
+                  <a:srgbClr val="115F59"/>
                 </a:solidFill>
               </a:rPr>
               <a:t>약속 3</a:t>
@@ -5180,7 +5180,7 @@
     <p:bg>
       <p:bgPr>
         <a:solidFill>
-          <a:srgbClr val="F0FAF4"/>
+          <a:srgbClr val="EEFCFB"/>
         </a:solidFill>
         <a:effectLst/>
       </p:bgPr>
@@ -5209,7 +5209,7 @@
           <a:noFill/>
           <a:ln w="28575">
             <a:solidFill>
-              <a:srgbClr val="308854"/>
+              <a:srgbClr val="26C5B8"/>
             </a:solidFill>
           </a:ln>
         </p:spPr>
@@ -5238,7 +5238,7 @@
           <a:noFill/>
           <a:ln w="9525">
             <a:solidFill>
-              <a:srgbClr val="D0F1DE"/>
+              <a:srgbClr val="D1FAF7"/>
             </a:solidFill>
           </a:ln>
         </p:spPr>
@@ -5280,7 +5280,7 @@
             <a:r>
               <a:rPr sz="3000" b="1" i="0">
                 <a:solidFill>
-                  <a:srgbClr val="153C26"/>
+                  <a:srgbClr val="115F59"/>
                 </a:solidFill>
               </a:rPr>
               <a:t>가족 사진</a:t>
@@ -5305,11 +5305,11 @@
             </a:avLst>
           </a:prstGeom>
           <a:solidFill>
-            <a:srgbClr val="D0F1DE"/>
+            <a:srgbClr val="D1FAF7"/>
           </a:solidFill>
           <a:ln w="19050">
             <a:solidFill>
-              <a:srgbClr val="308854"/>
+              <a:srgbClr val="26C5B8"/>
             </a:solidFill>
             <a:prstDash val="dash"/>
           </a:ln>
@@ -5328,7 +5328,7 @@
             <a:r>
               <a:rPr sz="1200" b="0" i="0">
                 <a:solidFill>
-                  <a:srgbClr val="153C26"/>
+                  <a:srgbClr val="115F59"/>
                 </a:solidFill>
               </a:rPr>
               <a:t>사진 1</a:t>
@@ -5353,11 +5353,11 @@
             </a:avLst>
           </a:prstGeom>
           <a:solidFill>
-            <a:srgbClr val="D0F1DE"/>
+            <a:srgbClr val="D1FAF7"/>
           </a:solidFill>
           <a:ln w="19050">
             <a:solidFill>
-              <a:srgbClr val="308854"/>
+              <a:srgbClr val="26C5B8"/>
             </a:solidFill>
             <a:prstDash val="dash"/>
           </a:ln>
@@ -5376,7 +5376,7 @@
             <a:r>
               <a:rPr sz="1200" b="0" i="0">
                 <a:solidFill>
-                  <a:srgbClr val="153C26"/>
+                  <a:srgbClr val="115F59"/>
                 </a:solidFill>
               </a:rPr>
               <a:t>사진 2</a:t>
@@ -5401,11 +5401,11 @@
             </a:avLst>
           </a:prstGeom>
           <a:solidFill>
-            <a:srgbClr val="D0F1DE"/>
+            <a:srgbClr val="D1FAF7"/>
           </a:solidFill>
           <a:ln w="19050">
             <a:solidFill>
-              <a:srgbClr val="308854"/>
+              <a:srgbClr val="26C5B8"/>
             </a:solidFill>
             <a:prstDash val="dash"/>
           </a:ln>
@@ -5424,7 +5424,7 @@
             <a:r>
               <a:rPr sz="1200" b="0" i="0">
                 <a:solidFill>
-                  <a:srgbClr val="153C26"/>
+                  <a:srgbClr val="115F59"/>
                 </a:solidFill>
               </a:rPr>
               <a:t>사진 3</a:t>
@@ -5449,11 +5449,11 @@
             </a:avLst>
           </a:prstGeom>
           <a:solidFill>
-            <a:srgbClr val="D0F1DE"/>
+            <a:srgbClr val="D1FAF7"/>
           </a:solidFill>
           <a:ln w="19050">
             <a:solidFill>
-              <a:srgbClr val="308854"/>
+              <a:srgbClr val="26C5B8"/>
             </a:solidFill>
             <a:prstDash val="dash"/>
           </a:ln>
@@ -5472,7 +5472,7 @@
             <a:r>
               <a:rPr sz="1200" b="0" i="0">
                 <a:solidFill>
-                  <a:srgbClr val="153C26"/>
+                  <a:srgbClr val="115F59"/>
                 </a:solidFill>
               </a:rPr>
               <a:t>사진 4</a:t>
@@ -5497,11 +5497,11 @@
             </a:avLst>
           </a:prstGeom>
           <a:solidFill>
-            <a:srgbClr val="D0F1DE"/>
+            <a:srgbClr val="D1FAF7"/>
           </a:solidFill>
           <a:ln w="19050">
             <a:solidFill>
-              <a:srgbClr val="308854"/>
+              <a:srgbClr val="26C5B8"/>
             </a:solidFill>
             <a:prstDash val="dash"/>
           </a:ln>
@@ -5520,7 +5520,7 @@
             <a:r>
               <a:rPr sz="1200" b="0" i="0">
                 <a:solidFill>
-                  <a:srgbClr val="153C26"/>
+                  <a:srgbClr val="115F59"/>
                 </a:solidFill>
               </a:rPr>
               <a:t>사진 5</a:t>
@@ -5545,11 +5545,11 @@
             </a:avLst>
           </a:prstGeom>
           <a:solidFill>
-            <a:srgbClr val="D0F1DE"/>
+            <a:srgbClr val="D1FAF7"/>
           </a:solidFill>
           <a:ln w="19050">
             <a:solidFill>
-              <a:srgbClr val="308854"/>
+              <a:srgbClr val="26C5B8"/>
             </a:solidFill>
             <a:prstDash val="dash"/>
           </a:ln>
@@ -5568,7 +5568,7 @@
             <a:r>
               <a:rPr sz="1200" b="0" i="0">
                 <a:solidFill>
-                  <a:srgbClr val="153C26"/>
+                  <a:srgbClr val="115F59"/>
                 </a:solidFill>
               </a:rPr>
               <a:t>사진 6</a:t>
@@ -5648,7 +5648,7 @@
             <a:r>
               <a:rPr sz="3600" b="1" i="0">
                 <a:solidFill>
-                  <a:srgbClr val="153C26"/>
+                  <a:srgbClr val="115F59"/>
                 </a:solidFill>
               </a:rPr>
               <a:t>우리 가족 소개를 마칩니다</a:t>
@@ -5686,7 +5686,7 @@
             <a:r>
               <a:rPr sz="1700" b="0" i="1">
                 <a:solidFill>
-                  <a:srgbClr val="153C26"/>
+                  <a:srgbClr val="115F59"/>
                 </a:solidFill>
               </a:rPr>
               <a:t>읽어 주셔서 고맙습니다</a:t>
@@ -5751,34 +5751,34 @@
         <a:sysClr val="window" lastClr="FFFFFF"/>
       </a:lt1>
       <a:dk2>
-        <a:srgbClr val="153C26"/>
+        <a:srgbClr val="115F59"/>
       </a:dk2>
       <a:lt2>
-        <a:srgbClr val="F0FAF4"/>
+        <a:srgbClr val="EEFCFB"/>
       </a:lt2>
       <a:accent1>
-        <a:srgbClr val="308854"/>
+        <a:srgbClr val="26C5B8"/>
       </a:accent1>
       <a:accent2>
-        <a:srgbClr val="8A3B91"/>
+        <a:srgbClr val="209DB6"/>
       </a:accent2>
       <a:accent3>
-        <a:srgbClr val="153C26"/>
+        <a:srgbClr val="115F59"/>
       </a:accent3>
       <a:accent4>
-        <a:srgbClr val="D0F1DE"/>
+        <a:srgbClr val="D1FAF7"/>
       </a:accent4>
       <a:accent5>
-        <a:srgbClr val="5D6272"/>
+        <a:srgbClr val="23B1B7"/>
       </a:accent5>
       <a:accent6>
-        <a:srgbClr val="738A7D"/>
+        <a:srgbClr val="709F9B"/>
       </a:accent6>
       <a:hlink>
-        <a:srgbClr val="308854"/>
+        <a:srgbClr val="26C5B8"/>
       </a:hlink>
       <a:folHlink>
-        <a:srgbClr val="153C26"/>
+        <a:srgbClr val="115F59"/>
       </a:folHlink>
     </a:clrScheme>
     <a:fontScheme name="Office">

--- a/public/fun/pack/pptx/family/가족소개_16_우리부부_평상수박.pptx
+++ b/public/fun/pack/pptx/family/가족소개_16_우리부부_평상수박.pptx
@@ -3286,6 +3286,14 @@
 <file path=ppt/slides/slide1.xml><?xml version="1.0" encoding="utf-8"?>
 <p:sld xmlns:a="http://schemas.openxmlformats.org/drawingml/2006/main" xmlns:p="http://schemas.openxmlformats.org/presentationml/2006/main" xmlns:r="http://schemas.openxmlformats.org/officeDocument/2006/relationships">
   <p:cSld>
+    <p:bg>
+      <p:bgPr>
+        <a:solidFill>
+          <a:srgbClr val="EAFDF2"/>
+        </a:solidFill>
+        <a:effectLst/>
+      </p:bgPr>
+    </p:bg>
     <p:spTree>
       <p:nvGrpSpPr>
         <p:cNvPr id="1" name=""/>
@@ -3293,30 +3301,116 @@
         <p:nvPr/>
       </p:nvGrpSpPr>
       <p:grpSpPr/>
-      <p:pic>
-        <p:nvPicPr>
-          <p:cNvPr id="3" name="표지 그림" descr="family-16.jpg"/>
-          <p:cNvPicPr>
-            <a:picLocks noChangeAspect="1"/>
-          </p:cNvPicPr>
+      <p:sp>
+        <p:nvSpPr>
+          <p:cNvPr id="3" name="사진 자리"/>
+          <p:cNvSpPr/>
           <p:nvPr/>
-        </p:nvPicPr>
-        <p:blipFill>
-          <a:blip r:embed="rId2"/>
-          <a:stretch>
-            <a:fillRect/>
-          </a:stretch>
-        </p:blipFill>
-        <p:spPr>
-          <a:xfrm>
-            <a:off x="0" y="0"/>
-            <a:ext cx="12191695" cy="6858000"/>
+        </p:nvSpPr>
+        <p:spPr>
+          <a:xfrm>
+            <a:off x="7802684" y="0"/>
+            <a:ext cx="4389010" cy="6858000"/>
           </a:xfrm>
           <a:prstGeom prst="rect">
             <a:avLst/>
           </a:prstGeom>
-        </p:spPr>
-      </p:pic>
+          <a:solidFill>
+            <a:srgbClr val="A5F3C5"/>
+          </a:solidFill>
+          <a:ln>
+            <a:noFill/>
+          </a:ln>
+        </p:spPr>
+        <p:txBody>
+          <a:bodyPr rtlCol="0" anchor="ctr" wrap="square" lIns="54864" rIns="54864" tIns="27432" bIns="27432">
+            <a:noAutofit/>
+          </a:bodyPr>
+          <a:lstStyle/>
+          <a:p>
+            <a:pPr algn="ctr">
+              <a:lnSpc>
+                <a:spcPct val="100000"/>
+              </a:lnSpc>
+            </a:pPr>
+            <a:r>
+              <a:rPr sz="1400" b="0" i="0">
+                <a:solidFill>
+                  <a:srgbClr val="274935"/>
+                </a:solidFill>
+              </a:rPr>
+              <a:t>사진을 넣어 주세요</a:t>
+            </a:r>
+          </a:p>
+        </p:txBody>
+      </p:sp>
+      <p:sp>
+        <p:nvSpPr>
+          <p:cNvPr id="4" name="장식"/>
+          <p:cNvSpPr/>
+          <p:nvPr/>
+        </p:nvSpPr>
+        <p:spPr>
+          <a:xfrm>
+            <a:off x="8168435" y="365760"/>
+            <a:ext cx="3657508" cy="6126480"/>
+          </a:xfrm>
+          <a:prstGeom prst="rect">
+            <a:avLst/>
+          </a:prstGeom>
+          <a:noFill/>
+          <a:ln w="9525">
+            <a:solidFill>
+              <a:srgbClr val="26231F"/>
+            </a:solidFill>
+          </a:ln>
+        </p:spPr>
+        <p:txBody>
+          <a:bodyPr rtlCol="0" anchor="ctr"/>
+          <a:lstStyle/>
+          <a:p>
+            <a:pPr algn="ctr"/>
+          </a:p>
+        </p:txBody>
+      </p:sp>
+      <p:sp>
+        <p:nvSpPr>
+          <p:cNvPr id="5" name="라벨"/>
+          <p:cNvSpPr txBox="1"/>
+          <p:nvPr/>
+        </p:nvSpPr>
+        <p:spPr>
+          <a:xfrm>
+            <a:off x="822960" y="2148840"/>
+            <a:ext cx="5608179" cy="274320"/>
+          </a:xfrm>
+          <a:prstGeom prst="rect">
+            <a:avLst/>
+          </a:prstGeom>
+          <a:noFill/>
+        </p:spPr>
+        <p:txBody>
+          <a:bodyPr wrap="square" lIns="54864" rIns="54864" tIns="27432" bIns="27432" anchor="t">
+            <a:noAutofit/>
+          </a:bodyPr>
+          <a:lstStyle/>
+          <a:p>
+            <a:pPr algn="l">
+              <a:lnSpc>
+                <a:spcPct val="115000"/>
+              </a:lnSpc>
+            </a:pPr>
+            <a:r>
+              <a:rPr sz="1000" b="1" i="0" spc="250">
+                <a:solidFill>
+                  <a:srgbClr val="26231F"/>
+                </a:solidFill>
+              </a:rPr>
+              <a:t>FAMILY ALBUM</a:t>
+            </a:r>
+          </a:p>
+        </p:txBody>
+      </p:sp>
       <p:sp>
         <p:nvSpPr>
           <p:cNvPr id="2" name="Title 1"/>
@@ -3329,8 +3423,8 @@
         </p:nvSpPr>
         <p:spPr>
           <a:xfrm>
-            <a:off x="853418" y="2057400"/>
-            <a:ext cx="6095847" cy="1554480"/>
+            <a:off x="822960" y="2606040"/>
+            <a:ext cx="5608179" cy="1188720"/>
           </a:xfrm>
         </p:spPr>
         <p:txBody>
@@ -3345,9 +3439,9 @@
               </a:lnSpc>
             </a:pPr>
             <a:r>
-              <a:rPr sz="3600" b="1" i="0">
-                <a:solidFill>
-                  <a:srgbClr val="115F59"/>
+              <a:rPr sz="4000" b="1" i="0">
+                <a:solidFill>
+                  <a:srgbClr val="26231F"/>
                 </a:solidFill>
               </a:rPr>
               <a:t>우리 가족을 소개합니다</a:t>
@@ -3357,14 +3451,14 @@
       </p:sp>
       <p:sp>
         <p:nvSpPr>
-          <p:cNvPr id="4" name="한 줄 문구"/>
+          <p:cNvPr id="6" name="한 줄 문구"/>
           <p:cNvSpPr txBox="1"/>
           <p:nvPr/>
         </p:nvSpPr>
         <p:spPr>
           <a:xfrm>
-            <a:off x="853418" y="3749039"/>
-            <a:ext cx="6095847" cy="822960"/>
+            <a:off x="822960" y="3886200"/>
+            <a:ext cx="5608179" cy="822960"/>
           </a:xfrm>
           <a:prstGeom prst="rect">
             <a:avLst/>
@@ -3383,9 +3477,9 @@
               </a:lnSpc>
             </a:pPr>
             <a:r>
-              <a:rPr sz="1700" b="0" i="1">
-                <a:solidFill>
-                  <a:srgbClr val="115F59"/>
+              <a:rPr sz="1700" b="0" i="0">
+                <a:solidFill>
+                  <a:srgbClr val="26231F"/>
                 </a:solidFill>
               </a:rPr>
               <a:t>평상에 앉아 수박 나눠 먹던 밤</a:t>
@@ -3395,14 +3489,14 @@
       </p:sp>
       <p:sp>
         <p:nvSpPr>
-          <p:cNvPr id="5" name="안내 문구"/>
+          <p:cNvPr id="7" name="안내 문구"/>
           <p:cNvSpPr txBox="1"/>
           <p:nvPr/>
         </p:nvSpPr>
         <p:spPr>
           <a:xfrm>
-            <a:off x="853418" y="4617720"/>
-            <a:ext cx="6095847" cy="914400"/>
+            <a:off x="822960" y="4754880"/>
+            <a:ext cx="5608179" cy="914400"/>
           </a:xfrm>
           <a:prstGeom prst="rect">
             <a:avLst/>
@@ -3423,10 +3517,10 @@
             <a:r>
               <a:rPr sz="1400" b="0" i="0">
                 <a:solidFill>
-                  <a:srgbClr val="666666"/>
+                  <a:srgbClr val="26231F"/>
                 </a:solidFill>
               </a:rPr>
-              <a:t>우리 부부 · 2027. 00. 00</a:t>
+              <a:t>우리 부부 · 날짜 입력</a:t>
             </a:r>
           </a:p>
         </p:txBody>
@@ -3445,7 +3539,7 @@
     <p:bg>
       <p:bgPr>
         <a:solidFill>
-          <a:srgbClr val="EEFCFB"/>
+          <a:srgbClr val="EAFDF2"/>
         </a:solidFill>
         <a:effectLst/>
       </p:bgPr>
@@ -3465,46 +3559,86 @@
         </p:nvSpPr>
         <p:spPr>
           <a:xfrm>
-            <a:off x="256032" y="256032"/>
-            <a:ext cx="11679631" cy="6345936"/>
+            <a:off x="640080" y="566928"/>
+            <a:ext cx="64008" cy="868680"/>
+          </a:xfrm>
+          <a:prstGeom prst="roundRect">
+            <a:avLst>
+              <a:gd name="adj" fmla="val 50000"/>
+            </a:avLst>
+          </a:prstGeom>
+          <a:solidFill>
+            <a:srgbClr val="7BEAA9"/>
+          </a:solidFill>
+          <a:ln>
+            <a:noFill/>
+          </a:ln>
+        </p:spPr>
+        <p:txBody>
+          <a:bodyPr rtlCol="0" anchor="ctr"/>
+          <a:lstStyle/>
+          <a:p>
+            <a:pPr algn="ctr"/>
+          </a:p>
+        </p:txBody>
+      </p:sp>
+      <p:sp>
+        <p:nvSpPr>
+          <p:cNvPr id="4" name="상단 라벨"/>
+          <p:cNvSpPr txBox="1"/>
+          <p:nvPr/>
+        </p:nvSpPr>
+        <p:spPr>
+          <a:xfrm>
+            <a:off x="868680" y="274320"/>
+            <a:ext cx="5486400" cy="274320"/>
           </a:xfrm>
           <a:prstGeom prst="rect">
             <a:avLst/>
           </a:prstGeom>
           <a:noFill/>
-          <a:ln w="28575">
-            <a:solidFill>
-              <a:srgbClr val="26C5B8"/>
-            </a:solidFill>
-          </a:ln>
-        </p:spPr>
-        <p:txBody>
-          <a:bodyPr rtlCol="0" anchor="ctr"/>
-          <a:lstStyle/>
-          <a:p>
-            <a:pPr algn="ctr"/>
-          </a:p>
-        </p:txBody>
-      </p:sp>
-      <p:sp>
-        <p:nvSpPr>
-          <p:cNvPr id="4" name="장식"/>
+        </p:spPr>
+        <p:txBody>
+          <a:bodyPr wrap="square" lIns="54864" rIns="54864" tIns="27432" bIns="27432" anchor="ctr">
+            <a:noAutofit/>
+          </a:bodyPr>
+          <a:lstStyle/>
+          <a:p>
+            <a:pPr algn="l">
+              <a:lnSpc>
+                <a:spcPct val="115000"/>
+              </a:lnSpc>
+            </a:pPr>
+            <a:r>
+              <a:rPr sz="900" b="1" i="0" spc="250">
+                <a:solidFill>
+                  <a:srgbClr val="8E8780"/>
+                </a:solidFill>
+              </a:rPr>
+              <a:t>FAMILY ALBUM</a:t>
+            </a:r>
+          </a:p>
+        </p:txBody>
+      </p:sp>
+      <p:sp>
+        <p:nvSpPr>
+          <p:cNvPr id="5" name="포인트"/>
           <p:cNvSpPr/>
           <p:nvPr/>
         </p:nvSpPr>
         <p:spPr>
           <a:xfrm>
-            <a:off x="384048" y="384048"/>
-            <a:ext cx="11423599" cy="6089904"/>
-          </a:xfrm>
-          <a:prstGeom prst="rect">
+            <a:off x="11167567" y="667512"/>
+            <a:ext cx="310896" cy="310896"/>
+          </a:xfrm>
+          <a:prstGeom prst="ellipse">
             <a:avLst/>
           </a:prstGeom>
-          <a:noFill/>
-          <a:ln w="9525">
-            <a:solidFill>
-              <a:srgbClr val="D1FAF7"/>
-            </a:solidFill>
+          <a:solidFill>
+            <a:srgbClr val="A5F3C5"/>
+          </a:solidFill>
+          <a:ln>
+            <a:noFill/>
           </a:ln>
         </p:spPr>
         <p:txBody>
@@ -3527,8 +3661,8 @@
         </p:nvSpPr>
         <p:spPr>
           <a:xfrm>
-            <a:off x="822960" y="548640"/>
-            <a:ext cx="9265615" cy="822960"/>
+            <a:off x="868680" y="566928"/>
+            <a:ext cx="9448495" cy="868680"/>
           </a:xfrm>
         </p:spPr>
         <p:txBody>
@@ -3545,7 +3679,7 @@
             <a:r>
               <a:rPr sz="3000" b="1" i="0">
                 <a:solidFill>
-                  <a:srgbClr val="115F59"/>
+                  <a:srgbClr val="26231F"/>
                 </a:solidFill>
               </a:rPr>
               <a:t>가족 구성원</a:t>
@@ -3555,25 +3689,23 @@
       </p:sp>
       <p:sp>
         <p:nvSpPr>
-          <p:cNvPr id="5" name="사진 자리"/>
+          <p:cNvPr id="6" name="사진 자리"/>
           <p:cNvSpPr/>
           <p:nvPr/>
         </p:nvSpPr>
         <p:spPr>
           <a:xfrm>
-            <a:off x="2247823" y="1554480"/>
-            <a:ext cx="2308860" cy="2308860"/>
+            <a:off x="2167813" y="1783080"/>
+            <a:ext cx="2286000" cy="2286000"/>
           </a:xfrm>
           <a:prstGeom prst="ellipse">
             <a:avLst/>
           </a:prstGeom>
           <a:solidFill>
-            <a:srgbClr val="D1FAF7"/>
+            <a:srgbClr val="D1FAE2"/>
           </a:solidFill>
           <a:ln w="19050">
-            <a:solidFill>
-              <a:srgbClr val="26C5B8"/>
-            </a:solidFill>
+            <a:noFill/>
             <a:prstDash val="dash"/>
           </a:ln>
         </p:spPr>
@@ -3591,7 +3723,7 @@
             <a:r>
               <a:rPr sz="1200" b="0" i="0">
                 <a:solidFill>
-                  <a:srgbClr val="115F59"/>
+                  <a:srgbClr val="8E8780"/>
                 </a:solidFill>
               </a:rPr>
               <a:t>사진</a:t>
@@ -3601,14 +3733,14 @@
       </p:sp>
       <p:sp>
         <p:nvSpPr>
-          <p:cNvPr id="6" name="TextBox 5"/>
+          <p:cNvPr id="7" name="TextBox 6"/>
           <p:cNvSpPr txBox="1"/>
           <p:nvPr/>
         </p:nvSpPr>
         <p:spPr>
           <a:xfrm>
-            <a:off x="822960" y="3954779"/>
-            <a:ext cx="5158587" cy="411480"/>
+            <a:off x="640080" y="4160520"/>
+            <a:ext cx="5341467" cy="411480"/>
           </a:xfrm>
           <a:prstGeom prst="rect">
             <a:avLst/>
@@ -3629,7 +3761,7 @@
             <a:r>
               <a:rPr sz="1600" b="1" i="0">
                 <a:solidFill>
-                  <a:srgbClr val="115F59"/>
+                  <a:srgbClr val="274935"/>
                 </a:solidFill>
               </a:rPr>
               <a:t>남편</a:t>
@@ -3639,14 +3771,14 @@
       </p:sp>
       <p:sp>
         <p:nvSpPr>
-          <p:cNvPr id="7" name="TextBox 6"/>
+          <p:cNvPr id="8" name="TextBox 7"/>
           <p:cNvSpPr txBox="1"/>
           <p:nvPr/>
         </p:nvSpPr>
         <p:spPr>
           <a:xfrm>
-            <a:off x="914400" y="4411979"/>
-            <a:ext cx="4975707" cy="1760219"/>
+            <a:off x="731519" y="4617720"/>
+            <a:ext cx="5158587" cy="1737360"/>
           </a:xfrm>
           <a:prstGeom prst="rect">
             <a:avLst/>
@@ -3707,25 +3839,23 @@
       </p:sp>
       <p:sp>
         <p:nvSpPr>
-          <p:cNvPr id="8" name="사진 자리"/>
+          <p:cNvPr id="9" name="사진 자리"/>
           <p:cNvSpPr/>
           <p:nvPr/>
         </p:nvSpPr>
         <p:spPr>
           <a:xfrm>
-            <a:off x="7635011" y="1554480"/>
-            <a:ext cx="2308860" cy="2308860"/>
+            <a:off x="7737881" y="1783080"/>
+            <a:ext cx="2286000" cy="2286000"/>
           </a:xfrm>
           <a:prstGeom prst="ellipse">
             <a:avLst/>
           </a:prstGeom>
           <a:solidFill>
-            <a:srgbClr val="D1FAF7"/>
+            <a:srgbClr val="D1FAE2"/>
           </a:solidFill>
           <a:ln w="19050">
-            <a:solidFill>
-              <a:srgbClr val="26C5B8"/>
-            </a:solidFill>
+            <a:noFill/>
             <a:prstDash val="dash"/>
           </a:ln>
         </p:spPr>
@@ -3743,7 +3873,7 @@
             <a:r>
               <a:rPr sz="1200" b="0" i="0">
                 <a:solidFill>
-                  <a:srgbClr val="115F59"/>
+                  <a:srgbClr val="8E8780"/>
                 </a:solidFill>
               </a:rPr>
               <a:t>사진</a:t>
@@ -3753,14 +3883,14 @@
       </p:sp>
       <p:sp>
         <p:nvSpPr>
-          <p:cNvPr id="9" name="TextBox 8"/>
+          <p:cNvPr id="10" name="TextBox 9"/>
           <p:cNvSpPr txBox="1"/>
           <p:nvPr/>
         </p:nvSpPr>
         <p:spPr>
           <a:xfrm>
-            <a:off x="6210147" y="3954779"/>
-            <a:ext cx="5158587" cy="411480"/>
+            <a:off x="6210147" y="4160520"/>
+            <a:ext cx="5341467" cy="411480"/>
           </a:xfrm>
           <a:prstGeom prst="rect">
             <a:avLst/>
@@ -3781,7 +3911,7 @@
             <a:r>
               <a:rPr sz="1600" b="1" i="0">
                 <a:solidFill>
-                  <a:srgbClr val="115F59"/>
+                  <a:srgbClr val="274935"/>
                 </a:solidFill>
               </a:rPr>
               <a:t>아내</a:t>
@@ -3791,14 +3921,14 @@
       </p:sp>
       <p:sp>
         <p:nvSpPr>
-          <p:cNvPr id="10" name="TextBox 9"/>
+          <p:cNvPr id="11" name="TextBox 10"/>
           <p:cNvSpPr txBox="1"/>
           <p:nvPr/>
         </p:nvSpPr>
         <p:spPr>
           <a:xfrm>
-            <a:off x="6301587" y="4411979"/>
-            <a:ext cx="4975707" cy="1760219"/>
+            <a:off x="6301587" y="4617720"/>
+            <a:ext cx="5158587" cy="1737360"/>
           </a:xfrm>
           <a:prstGeom prst="rect">
             <a:avLst/>
@@ -3871,7 +4001,7 @@
     <p:bg>
       <p:bgPr>
         <a:solidFill>
-          <a:srgbClr val="EEFCFB"/>
+          <a:srgbClr val="EAFDF2"/>
         </a:solidFill>
         <a:effectLst/>
       </p:bgPr>
@@ -3891,46 +4021,86 @@
         </p:nvSpPr>
         <p:spPr>
           <a:xfrm>
-            <a:off x="256032" y="256032"/>
-            <a:ext cx="11679631" cy="6345936"/>
+            <a:off x="640080" y="566928"/>
+            <a:ext cx="64008" cy="868680"/>
+          </a:xfrm>
+          <a:prstGeom prst="roundRect">
+            <a:avLst>
+              <a:gd name="adj" fmla="val 50000"/>
+            </a:avLst>
+          </a:prstGeom>
+          <a:solidFill>
+            <a:srgbClr val="7BEAA9"/>
+          </a:solidFill>
+          <a:ln>
+            <a:noFill/>
+          </a:ln>
+        </p:spPr>
+        <p:txBody>
+          <a:bodyPr rtlCol="0" anchor="ctr"/>
+          <a:lstStyle/>
+          <a:p>
+            <a:pPr algn="ctr"/>
+          </a:p>
+        </p:txBody>
+      </p:sp>
+      <p:sp>
+        <p:nvSpPr>
+          <p:cNvPr id="4" name="상단 라벨"/>
+          <p:cNvSpPr txBox="1"/>
+          <p:nvPr/>
+        </p:nvSpPr>
+        <p:spPr>
+          <a:xfrm>
+            <a:off x="868680" y="274320"/>
+            <a:ext cx="5486400" cy="274320"/>
           </a:xfrm>
           <a:prstGeom prst="rect">
             <a:avLst/>
           </a:prstGeom>
           <a:noFill/>
-          <a:ln w="28575">
-            <a:solidFill>
-              <a:srgbClr val="26C5B8"/>
-            </a:solidFill>
-          </a:ln>
-        </p:spPr>
-        <p:txBody>
-          <a:bodyPr rtlCol="0" anchor="ctr"/>
-          <a:lstStyle/>
-          <a:p>
-            <a:pPr algn="ctr"/>
-          </a:p>
-        </p:txBody>
-      </p:sp>
-      <p:sp>
-        <p:nvSpPr>
-          <p:cNvPr id="4" name="장식"/>
+        </p:spPr>
+        <p:txBody>
+          <a:bodyPr wrap="square" lIns="54864" rIns="54864" tIns="27432" bIns="27432" anchor="ctr">
+            <a:noAutofit/>
+          </a:bodyPr>
+          <a:lstStyle/>
+          <a:p>
+            <a:pPr algn="l">
+              <a:lnSpc>
+                <a:spcPct val="115000"/>
+              </a:lnSpc>
+            </a:pPr>
+            <a:r>
+              <a:rPr sz="900" b="1" i="0" spc="250">
+                <a:solidFill>
+                  <a:srgbClr val="8E8780"/>
+                </a:solidFill>
+              </a:rPr>
+              <a:t>FAMILY ALBUM</a:t>
+            </a:r>
+          </a:p>
+        </p:txBody>
+      </p:sp>
+      <p:sp>
+        <p:nvSpPr>
+          <p:cNvPr id="5" name="포인트"/>
           <p:cNvSpPr/>
           <p:nvPr/>
         </p:nvSpPr>
         <p:spPr>
           <a:xfrm>
-            <a:off x="384048" y="384048"/>
-            <a:ext cx="11423599" cy="6089904"/>
-          </a:xfrm>
-          <a:prstGeom prst="rect">
+            <a:off x="11167567" y="667512"/>
+            <a:ext cx="310896" cy="310896"/>
+          </a:xfrm>
+          <a:prstGeom prst="ellipse">
             <a:avLst/>
           </a:prstGeom>
-          <a:noFill/>
-          <a:ln w="9525">
-            <a:solidFill>
-              <a:srgbClr val="D1FAF7"/>
-            </a:solidFill>
+          <a:solidFill>
+            <a:srgbClr val="A5F3C5"/>
+          </a:solidFill>
+          <a:ln>
+            <a:noFill/>
           </a:ln>
         </p:spPr>
         <p:txBody>
@@ -3953,8 +4123,8 @@
         </p:nvSpPr>
         <p:spPr>
           <a:xfrm>
-            <a:off x="822960" y="548640"/>
-            <a:ext cx="9265615" cy="822960"/>
+            <a:off x="868680" y="566928"/>
+            <a:ext cx="9448495" cy="868680"/>
           </a:xfrm>
         </p:spPr>
         <p:txBody>
@@ -3971,7 +4141,7 @@
             <a:r>
               <a:rPr sz="3000" b="1" i="0">
                 <a:solidFill>
-                  <a:srgbClr val="115F59"/>
+                  <a:srgbClr val="26231F"/>
                 </a:solidFill>
               </a:rPr>
               <a:t>우리 가족 이야기</a:t>
@@ -3981,20 +4151,20 @@
       </p:sp>
       <p:sp>
         <p:nvSpPr>
-          <p:cNvPr id="5" name="타임라인 선"/>
+          <p:cNvPr id="6" name="타임라인 선"/>
           <p:cNvSpPr/>
           <p:nvPr/>
         </p:nvSpPr>
         <p:spPr>
           <a:xfrm>
-            <a:off x="822960" y="3291840"/>
-            <a:ext cx="10545775" cy="54864"/>
+            <a:off x="640080" y="3520440"/>
+            <a:ext cx="10911535" cy="54864"/>
           </a:xfrm>
           <a:prstGeom prst="rect">
             <a:avLst/>
           </a:prstGeom>
           <a:solidFill>
-            <a:srgbClr val="D1FAF7"/>
+            <a:srgbClr val="D1FAE2"/>
           </a:solidFill>
           <a:ln>
             <a:noFill/>
@@ -4010,20 +4180,20 @@
       </p:sp>
       <p:sp>
         <p:nvSpPr>
-          <p:cNvPr id="6" name="때 1"/>
+          <p:cNvPr id="7" name="때 1"/>
           <p:cNvSpPr/>
           <p:nvPr/>
         </p:nvSpPr>
         <p:spPr>
           <a:xfrm>
-            <a:off x="1940013" y="3108960"/>
+            <a:off x="1802853" y="3337560"/>
             <a:ext cx="402336" cy="402336"/>
           </a:xfrm>
           <a:prstGeom prst="ellipse">
             <a:avLst/>
           </a:prstGeom>
           <a:solidFill>
-            <a:srgbClr val="26C5B8"/>
+            <a:srgbClr val="7BEAA9"/>
           </a:solidFill>
           <a:ln w="38100">
             <a:solidFill>
@@ -4041,14 +4211,14 @@
       </p:sp>
       <p:sp>
         <p:nvSpPr>
-          <p:cNvPr id="7" name="TextBox 6"/>
+          <p:cNvPr id="8" name="TextBox 7"/>
           <p:cNvSpPr txBox="1"/>
           <p:nvPr/>
         </p:nvSpPr>
         <p:spPr>
           <a:xfrm>
-            <a:off x="868680" y="2468880"/>
-            <a:ext cx="2545003" cy="457200"/>
+            <a:off x="685800" y="2697480"/>
+            <a:ext cx="2636443" cy="457200"/>
           </a:xfrm>
           <a:prstGeom prst="rect">
             <a:avLst/>
@@ -4069,7 +4239,7 @@
             <a:r>
               <a:rPr sz="1600" b="1" i="0">
                 <a:solidFill>
-                  <a:srgbClr val="26C5B8"/>
+                  <a:srgbClr val="7BEAA9"/>
                 </a:solidFill>
               </a:rPr>
               <a:t>처음 만난 날</a:t>
@@ -4079,14 +4249,14 @@
       </p:sp>
       <p:sp>
         <p:nvSpPr>
-          <p:cNvPr id="8" name="TextBox 7"/>
+          <p:cNvPr id="9" name="TextBox 8"/>
           <p:cNvSpPr txBox="1"/>
           <p:nvPr/>
         </p:nvSpPr>
         <p:spPr>
           <a:xfrm>
-            <a:off x="914400" y="3657600"/>
-            <a:ext cx="2453563" cy="457200"/>
+            <a:off x="731519" y="3886200"/>
+            <a:ext cx="2545003" cy="457200"/>
           </a:xfrm>
           <a:prstGeom prst="rect">
             <a:avLst/>
@@ -4107,7 +4277,7 @@
             <a:r>
               <a:rPr sz="1800" b="1" i="0">
                 <a:solidFill>
-                  <a:srgbClr val="115F59"/>
+                  <a:srgbClr val="274935"/>
                 </a:solidFill>
               </a:rPr>
               <a:t>첫 만남</a:t>
@@ -4117,14 +4287,14 @@
       </p:sp>
       <p:sp>
         <p:nvSpPr>
-          <p:cNvPr id="9" name="TextBox 8"/>
+          <p:cNvPr id="10" name="TextBox 9"/>
           <p:cNvSpPr txBox="1"/>
           <p:nvPr/>
         </p:nvSpPr>
         <p:spPr>
           <a:xfrm>
-            <a:off x="914400" y="4160520"/>
-            <a:ext cx="2453563" cy="1645920"/>
+            <a:off x="731519" y="4389120"/>
+            <a:ext cx="2545003" cy="1645920"/>
           </a:xfrm>
           <a:prstGeom prst="rect">
             <a:avLst/>
@@ -4145,7 +4315,7 @@
             <a:r>
               <a:rPr sz="1500" b="0" i="0">
                 <a:solidFill>
-                  <a:srgbClr val="2B2B2B"/>
+                  <a:srgbClr val="26231F"/>
                 </a:solidFill>
               </a:rPr>
               <a:t>어디에서 어떻게 만났나요?</a:t>
@@ -4155,20 +4325,20 @@
       </p:sp>
       <p:sp>
         <p:nvSpPr>
-          <p:cNvPr id="10" name="때 2"/>
+          <p:cNvPr id="11" name="때 2"/>
           <p:cNvSpPr/>
           <p:nvPr/>
         </p:nvSpPr>
         <p:spPr>
           <a:xfrm>
-            <a:off x="4576457" y="3108960"/>
+            <a:off x="4530737" y="3337560"/>
             <a:ext cx="402336" cy="402336"/>
           </a:xfrm>
           <a:prstGeom prst="ellipse">
             <a:avLst/>
           </a:prstGeom>
           <a:solidFill>
-            <a:srgbClr val="26C5B8"/>
+            <a:srgbClr val="7BEAA9"/>
           </a:solidFill>
           <a:ln w="38100">
             <a:solidFill>
@@ -4186,14 +4356,14 @@
       </p:sp>
       <p:sp>
         <p:nvSpPr>
-          <p:cNvPr id="11" name="TextBox 10"/>
+          <p:cNvPr id="12" name="TextBox 11"/>
           <p:cNvSpPr txBox="1"/>
           <p:nvPr/>
         </p:nvSpPr>
         <p:spPr>
           <a:xfrm>
-            <a:off x="3505123" y="2468880"/>
-            <a:ext cx="2545003" cy="457200"/>
+            <a:off x="3413683" y="2697480"/>
+            <a:ext cx="2636443" cy="457200"/>
           </a:xfrm>
           <a:prstGeom prst="rect">
             <a:avLst/>
@@ -4214,7 +4384,7 @@
             <a:r>
               <a:rPr sz="1600" b="1" i="0">
                 <a:solidFill>
-                  <a:srgbClr val="26C5B8"/>
+                  <a:srgbClr val="7BEAA9"/>
                 </a:solidFill>
               </a:rPr>
               <a:t>결혼</a:t>
@@ -4224,14 +4394,14 @@
       </p:sp>
       <p:sp>
         <p:nvSpPr>
-          <p:cNvPr id="12" name="TextBox 11"/>
+          <p:cNvPr id="13" name="TextBox 12"/>
           <p:cNvSpPr txBox="1"/>
           <p:nvPr/>
         </p:nvSpPr>
         <p:spPr>
           <a:xfrm>
-            <a:off x="3550843" y="3657600"/>
-            <a:ext cx="2453563" cy="457200"/>
+            <a:off x="3459403" y="3886200"/>
+            <a:ext cx="2545003" cy="457200"/>
           </a:xfrm>
           <a:prstGeom prst="rect">
             <a:avLst/>
@@ -4252,7 +4422,7 @@
             <a:r>
               <a:rPr sz="1800" b="1" i="0">
                 <a:solidFill>
-                  <a:srgbClr val="115F59"/>
+                  <a:srgbClr val="274935"/>
                 </a:solidFill>
               </a:rPr>
               <a:t>함께 시작한 날</a:t>
@@ -4262,14 +4432,14 @@
       </p:sp>
       <p:sp>
         <p:nvSpPr>
-          <p:cNvPr id="13" name="TextBox 12"/>
+          <p:cNvPr id="14" name="TextBox 13"/>
           <p:cNvSpPr txBox="1"/>
           <p:nvPr/>
         </p:nvSpPr>
         <p:spPr>
           <a:xfrm>
-            <a:off x="3550843" y="4160520"/>
-            <a:ext cx="2453563" cy="1645920"/>
+            <a:off x="3459403" y="4389120"/>
+            <a:ext cx="2545003" cy="1645920"/>
           </a:xfrm>
           <a:prstGeom prst="rect">
             <a:avLst/>
@@ -4290,7 +4460,7 @@
             <a:r>
               <a:rPr sz="1500" b="0" i="0">
                 <a:solidFill>
-                  <a:srgbClr val="2B2B2B"/>
+                  <a:srgbClr val="26231F"/>
                 </a:solidFill>
               </a:rPr>
               <a:t>그날의 기억을 적어요</a:t>
@@ -4300,20 +4470,20 @@
       </p:sp>
       <p:sp>
         <p:nvSpPr>
-          <p:cNvPr id="14" name="때 3"/>
+          <p:cNvPr id="15" name="때 3"/>
           <p:cNvSpPr/>
           <p:nvPr/>
         </p:nvSpPr>
         <p:spPr>
           <a:xfrm>
-            <a:off x="7212901" y="3108960"/>
+            <a:off x="7258621" y="3337560"/>
             <a:ext cx="402336" cy="402336"/>
           </a:xfrm>
           <a:prstGeom prst="ellipse">
             <a:avLst/>
           </a:prstGeom>
           <a:solidFill>
-            <a:srgbClr val="26C5B8"/>
+            <a:srgbClr val="7BEAA9"/>
           </a:solidFill>
           <a:ln w="38100">
             <a:solidFill>
@@ -4331,14 +4501,14 @@
       </p:sp>
       <p:sp>
         <p:nvSpPr>
-          <p:cNvPr id="15" name="TextBox 14"/>
+          <p:cNvPr id="16" name="TextBox 15"/>
           <p:cNvSpPr txBox="1"/>
           <p:nvPr/>
         </p:nvSpPr>
         <p:spPr>
           <a:xfrm>
-            <a:off x="6141567" y="2468880"/>
-            <a:ext cx="2545003" cy="457200"/>
+            <a:off x="6141567" y="2697480"/>
+            <a:ext cx="2636443" cy="457200"/>
           </a:xfrm>
           <a:prstGeom prst="rect">
             <a:avLst/>
@@ -4359,7 +4529,7 @@
             <a:r>
               <a:rPr sz="1600" b="1" i="0">
                 <a:solidFill>
-                  <a:srgbClr val="26C5B8"/>
+                  <a:srgbClr val="7BEAA9"/>
                 </a:solidFill>
               </a:rPr>
               <a:t>첫 집</a:t>
@@ -4369,14 +4539,14 @@
       </p:sp>
       <p:sp>
         <p:nvSpPr>
-          <p:cNvPr id="16" name="TextBox 15"/>
+          <p:cNvPr id="17" name="TextBox 16"/>
           <p:cNvSpPr txBox="1"/>
           <p:nvPr/>
         </p:nvSpPr>
         <p:spPr>
           <a:xfrm>
-            <a:off x="6187287" y="3657600"/>
-            <a:ext cx="2453563" cy="457200"/>
+            <a:off x="6187287" y="3886200"/>
+            <a:ext cx="2545003" cy="457200"/>
           </a:xfrm>
           <a:prstGeom prst="rect">
             <a:avLst/>
@@ -4397,7 +4567,7 @@
             <a:r>
               <a:rPr sz="1800" b="1" i="0">
                 <a:solidFill>
-                  <a:srgbClr val="115F59"/>
+                  <a:srgbClr val="274935"/>
                 </a:solidFill>
               </a:rPr>
               <a:t>우리의 보금자리</a:t>
@@ -4407,14 +4577,14 @@
       </p:sp>
       <p:sp>
         <p:nvSpPr>
-          <p:cNvPr id="17" name="TextBox 16"/>
+          <p:cNvPr id="18" name="TextBox 17"/>
           <p:cNvSpPr txBox="1"/>
           <p:nvPr/>
         </p:nvSpPr>
         <p:spPr>
           <a:xfrm>
-            <a:off x="6187287" y="4160520"/>
-            <a:ext cx="2453563" cy="1645920"/>
+            <a:off x="6187287" y="4389120"/>
+            <a:ext cx="2545003" cy="1645920"/>
           </a:xfrm>
           <a:prstGeom prst="rect">
             <a:avLst/>
@@ -4435,7 +4605,7 @@
             <a:r>
               <a:rPr sz="1500" b="0" i="0">
                 <a:solidFill>
-                  <a:srgbClr val="2B2B2B"/>
+                  <a:srgbClr val="26231F"/>
                 </a:solidFill>
               </a:rPr>
               <a:t>처음 이사한 날</a:t>
@@ -4445,20 +4615,20 @@
       </p:sp>
       <p:sp>
         <p:nvSpPr>
-          <p:cNvPr id="18" name="때 4"/>
+          <p:cNvPr id="19" name="때 4"/>
           <p:cNvSpPr/>
           <p:nvPr/>
         </p:nvSpPr>
         <p:spPr>
           <a:xfrm>
-            <a:off x="9849345" y="3108960"/>
+            <a:off x="9986505" y="3337560"/>
             <a:ext cx="402336" cy="402336"/>
           </a:xfrm>
           <a:prstGeom prst="ellipse">
             <a:avLst/>
           </a:prstGeom>
           <a:solidFill>
-            <a:srgbClr val="26C5B8"/>
+            <a:srgbClr val="7BEAA9"/>
           </a:solidFill>
           <a:ln w="38100">
             <a:solidFill>
@@ -4476,14 +4646,14 @@
       </p:sp>
       <p:sp>
         <p:nvSpPr>
-          <p:cNvPr id="19" name="TextBox 18"/>
+          <p:cNvPr id="20" name="TextBox 19"/>
           <p:cNvSpPr txBox="1"/>
           <p:nvPr/>
         </p:nvSpPr>
         <p:spPr>
           <a:xfrm>
-            <a:off x="8778011" y="2468880"/>
-            <a:ext cx="2545003" cy="457200"/>
+            <a:off x="8869451" y="2697480"/>
+            <a:ext cx="2636443" cy="457200"/>
           </a:xfrm>
           <a:prstGeom prst="rect">
             <a:avLst/>
@@ -4504,7 +4674,7 @@
             <a:r>
               <a:rPr sz="1600" b="1" i="0">
                 <a:solidFill>
-                  <a:srgbClr val="26C5B8"/>
+                  <a:srgbClr val="7BEAA9"/>
                 </a:solidFill>
               </a:rPr>
               <a:t>지금</a:t>
@@ -4514,14 +4684,14 @@
       </p:sp>
       <p:sp>
         <p:nvSpPr>
-          <p:cNvPr id="20" name="TextBox 19"/>
+          <p:cNvPr id="21" name="TextBox 20"/>
           <p:cNvSpPr txBox="1"/>
           <p:nvPr/>
         </p:nvSpPr>
         <p:spPr>
           <a:xfrm>
-            <a:off x="8823731" y="3657600"/>
-            <a:ext cx="2453563" cy="457200"/>
+            <a:off x="8915171" y="3886200"/>
+            <a:ext cx="2545003" cy="457200"/>
           </a:xfrm>
           <a:prstGeom prst="rect">
             <a:avLst/>
@@ -4542,7 +4712,7 @@
             <a:r>
               <a:rPr sz="1800" b="1" i="0">
                 <a:solidFill>
-                  <a:srgbClr val="115F59"/>
+                  <a:srgbClr val="274935"/>
                 </a:solidFill>
               </a:rPr>
               <a:t>오늘의 우리</a:t>
@@ -4552,14 +4722,14 @@
       </p:sp>
       <p:sp>
         <p:nvSpPr>
-          <p:cNvPr id="21" name="TextBox 20"/>
+          <p:cNvPr id="22" name="TextBox 21"/>
           <p:cNvSpPr txBox="1"/>
           <p:nvPr/>
         </p:nvSpPr>
         <p:spPr>
           <a:xfrm>
-            <a:off x="8823731" y="4160520"/>
-            <a:ext cx="2453563" cy="1645920"/>
+            <a:off x="8915171" y="4389120"/>
+            <a:ext cx="2545003" cy="1645920"/>
           </a:xfrm>
           <a:prstGeom prst="rect">
             <a:avLst/>
@@ -4580,7 +4750,7 @@
             <a:r>
               <a:rPr sz="1500" b="0" i="0">
                 <a:solidFill>
-                  <a:srgbClr val="2B2B2B"/>
+                  <a:srgbClr val="26231F"/>
                 </a:solidFill>
               </a:rPr>
               <a:t>요즘 우리 이야기</a:t>
@@ -4602,7 +4772,7 @@
     <p:bg>
       <p:bgPr>
         <a:solidFill>
-          <a:srgbClr val="EEFCFB"/>
+          <a:srgbClr val="EAFDF2"/>
         </a:solidFill>
         <a:effectLst/>
       </p:bgPr>
@@ -4622,46 +4792,86 @@
         </p:nvSpPr>
         <p:spPr>
           <a:xfrm>
-            <a:off x="256032" y="256032"/>
-            <a:ext cx="11679631" cy="6345936"/>
+            <a:off x="640080" y="566928"/>
+            <a:ext cx="64008" cy="868680"/>
+          </a:xfrm>
+          <a:prstGeom prst="roundRect">
+            <a:avLst>
+              <a:gd name="adj" fmla="val 50000"/>
+            </a:avLst>
+          </a:prstGeom>
+          <a:solidFill>
+            <a:srgbClr val="7BEAA9"/>
+          </a:solidFill>
+          <a:ln>
+            <a:noFill/>
+          </a:ln>
+        </p:spPr>
+        <p:txBody>
+          <a:bodyPr rtlCol="0" anchor="ctr"/>
+          <a:lstStyle/>
+          <a:p>
+            <a:pPr algn="ctr"/>
+          </a:p>
+        </p:txBody>
+      </p:sp>
+      <p:sp>
+        <p:nvSpPr>
+          <p:cNvPr id="4" name="상단 라벨"/>
+          <p:cNvSpPr txBox="1"/>
+          <p:nvPr/>
+        </p:nvSpPr>
+        <p:spPr>
+          <a:xfrm>
+            <a:off x="868680" y="274320"/>
+            <a:ext cx="5486400" cy="274320"/>
           </a:xfrm>
           <a:prstGeom prst="rect">
             <a:avLst/>
           </a:prstGeom>
           <a:noFill/>
-          <a:ln w="28575">
-            <a:solidFill>
-              <a:srgbClr val="26C5B8"/>
-            </a:solidFill>
-          </a:ln>
-        </p:spPr>
-        <p:txBody>
-          <a:bodyPr rtlCol="0" anchor="ctr"/>
-          <a:lstStyle/>
-          <a:p>
-            <a:pPr algn="ctr"/>
-          </a:p>
-        </p:txBody>
-      </p:sp>
-      <p:sp>
-        <p:nvSpPr>
-          <p:cNvPr id="4" name="장식"/>
+        </p:spPr>
+        <p:txBody>
+          <a:bodyPr wrap="square" lIns="54864" rIns="54864" tIns="27432" bIns="27432" anchor="ctr">
+            <a:noAutofit/>
+          </a:bodyPr>
+          <a:lstStyle/>
+          <a:p>
+            <a:pPr algn="l">
+              <a:lnSpc>
+                <a:spcPct val="115000"/>
+              </a:lnSpc>
+            </a:pPr>
+            <a:r>
+              <a:rPr sz="900" b="1" i="0" spc="250">
+                <a:solidFill>
+                  <a:srgbClr val="8E8780"/>
+                </a:solidFill>
+              </a:rPr>
+              <a:t>FAMILY ALBUM</a:t>
+            </a:r>
+          </a:p>
+        </p:txBody>
+      </p:sp>
+      <p:sp>
+        <p:nvSpPr>
+          <p:cNvPr id="5" name="포인트"/>
           <p:cNvSpPr/>
           <p:nvPr/>
         </p:nvSpPr>
         <p:spPr>
           <a:xfrm>
-            <a:off x="384048" y="384048"/>
-            <a:ext cx="11423599" cy="6089904"/>
-          </a:xfrm>
-          <a:prstGeom prst="rect">
+            <a:off x="11167567" y="667512"/>
+            <a:ext cx="310896" cy="310896"/>
+          </a:xfrm>
+          <a:prstGeom prst="ellipse">
             <a:avLst/>
           </a:prstGeom>
-          <a:noFill/>
-          <a:ln w="9525">
-            <a:solidFill>
-              <a:srgbClr val="D1FAF7"/>
-            </a:solidFill>
+          <a:solidFill>
+            <a:srgbClr val="A5F3C5"/>
+          </a:solidFill>
+          <a:ln>
+            <a:noFill/>
           </a:ln>
         </p:spPr>
         <p:txBody>
@@ -4684,8 +4894,8 @@
         </p:nvSpPr>
         <p:spPr>
           <a:xfrm>
-            <a:off x="822960" y="548640"/>
-            <a:ext cx="9265615" cy="822960"/>
+            <a:off x="868680" y="566928"/>
+            <a:ext cx="9448495" cy="868680"/>
           </a:xfrm>
         </p:spPr>
         <p:txBody>
@@ -4702,7 +4912,7 @@
             <a:r>
               <a:rPr sz="3000" b="1" i="0">
                 <a:solidFill>
-                  <a:srgbClr val="115F59"/>
+                  <a:srgbClr val="26231F"/>
                 </a:solidFill>
               </a:rPr>
               <a:t>우리 가족의 약속</a:t>
@@ -4712,26 +4922,24 @@
       </p:sp>
       <p:sp>
         <p:nvSpPr>
-          <p:cNvPr id="5" name="줄 1"/>
+          <p:cNvPr id="6" name="줄 1"/>
           <p:cNvSpPr/>
           <p:nvPr/>
         </p:nvSpPr>
         <p:spPr>
           <a:xfrm>
-            <a:off x="822960" y="1554480"/>
-            <a:ext cx="10545775" cy="1005840"/>
+            <a:off x="640080" y="1783080"/>
+            <a:ext cx="10911535" cy="1005840"/>
           </a:xfrm>
           <a:prstGeom prst="roundRect">
             <a:avLst>
-              <a:gd name="adj" fmla="val 8000"/>
+              <a:gd name="adj" fmla="val 7000"/>
             </a:avLst>
           </a:prstGeom>
-          <a:solidFill>
-            <a:srgbClr val="EEFCFB"/>
-          </a:solidFill>
-          <a:ln w="12700">
+          <a:noFill/>
+          <a:ln w="15875">
             <a:solidFill>
-              <a:srgbClr val="D1FAF7"/>
+              <a:srgbClr val="7BEAA9"/>
             </a:solidFill>
           </a:ln>
         </p:spPr>
@@ -4745,23 +4953,23 @@
       </p:sp>
       <p:sp>
         <p:nvSpPr>
-          <p:cNvPr id="6" name="번호 1"/>
+          <p:cNvPr id="7" name="번호 1"/>
           <p:cNvSpPr/>
           <p:nvPr/>
         </p:nvSpPr>
         <p:spPr>
           <a:xfrm>
-            <a:off x="1005840" y="1828800"/>
+            <a:off x="822959" y="2057400"/>
             <a:ext cx="457200" cy="457200"/>
           </a:xfrm>
           <a:prstGeom prst="ellipse">
             <a:avLst/>
           </a:prstGeom>
-          <a:solidFill>
-            <a:srgbClr val="26C5B8"/>
-          </a:solidFill>
-          <a:ln>
-            <a:noFill/>
+          <a:noFill/>
+          <a:ln w="19050">
+            <a:solidFill>
+              <a:srgbClr val="7BEAA9"/>
+            </a:solidFill>
           </a:ln>
         </p:spPr>
         <p:txBody>
@@ -4778,7 +4986,7 @@
             <a:r>
               <a:rPr sz="1600" b="1" i="0">
                 <a:solidFill>
-                  <a:srgbClr val="FFFFFF"/>
+                  <a:srgbClr val="274935"/>
                 </a:solidFill>
               </a:rPr>
               <a:t>1</a:t>
@@ -4788,13 +4996,13 @@
       </p:sp>
       <p:sp>
         <p:nvSpPr>
-          <p:cNvPr id="7" name="TextBox 6"/>
+          <p:cNvPr id="8" name="TextBox 7"/>
           <p:cNvSpPr txBox="1"/>
           <p:nvPr/>
         </p:nvSpPr>
         <p:spPr>
           <a:xfrm>
-            <a:off x="1691640" y="1600200"/>
+            <a:off x="1508760" y="1828800"/>
             <a:ext cx="2743200" cy="914400"/>
           </a:xfrm>
           <a:prstGeom prst="rect">
@@ -4816,7 +5024,7 @@
             <a:r>
               <a:rPr sz="1800" b="1" i="0">
                 <a:solidFill>
-                  <a:srgbClr val="115F59"/>
+                  <a:srgbClr val="274935"/>
                 </a:solidFill>
               </a:rPr>
               <a:t>약속 1</a:t>
@@ -4826,14 +5034,14 @@
       </p:sp>
       <p:sp>
         <p:nvSpPr>
-          <p:cNvPr id="8" name="TextBox 7"/>
+          <p:cNvPr id="9" name="TextBox 8"/>
           <p:cNvSpPr txBox="1"/>
           <p:nvPr/>
         </p:nvSpPr>
         <p:spPr>
           <a:xfrm>
-            <a:off x="4480560" y="1600200"/>
-            <a:ext cx="6705295" cy="914400"/>
+            <a:off x="4297680" y="1828800"/>
+            <a:ext cx="7071055" cy="914400"/>
           </a:xfrm>
           <a:prstGeom prst="rect">
             <a:avLst/>
@@ -4854,7 +5062,7 @@
             <a:r>
               <a:rPr sz="1700" b="0" i="0">
                 <a:solidFill>
-                  <a:srgbClr val="2B2B2B"/>
+                  <a:srgbClr val="26231F"/>
                 </a:solidFill>
               </a:rPr>
               <a:t>하루에 한 번 서로 안아 주기</a:t>
@@ -4864,26 +5072,24 @@
       </p:sp>
       <p:sp>
         <p:nvSpPr>
-          <p:cNvPr id="9" name="줄 2"/>
+          <p:cNvPr id="10" name="줄 2"/>
           <p:cNvSpPr/>
           <p:nvPr/>
         </p:nvSpPr>
         <p:spPr>
           <a:xfrm>
-            <a:off x="822960" y="2697480"/>
-            <a:ext cx="10545775" cy="1005840"/>
+            <a:off x="640080" y="2926080"/>
+            <a:ext cx="10911535" cy="1005840"/>
           </a:xfrm>
           <a:prstGeom prst="roundRect">
             <a:avLst>
-              <a:gd name="adj" fmla="val 8000"/>
+              <a:gd name="adj" fmla="val 7000"/>
             </a:avLst>
           </a:prstGeom>
-          <a:solidFill>
-            <a:srgbClr val="EEFCFB"/>
-          </a:solidFill>
-          <a:ln w="12700">
+          <a:noFill/>
+          <a:ln w="15875">
             <a:solidFill>
-              <a:srgbClr val="D1FAF7"/>
+              <a:srgbClr val="7BEAA9"/>
             </a:solidFill>
           </a:ln>
         </p:spPr>
@@ -4897,23 +5103,23 @@
       </p:sp>
       <p:sp>
         <p:nvSpPr>
-          <p:cNvPr id="10" name="번호 2"/>
+          <p:cNvPr id="11" name="번호 2"/>
           <p:cNvSpPr/>
           <p:nvPr/>
         </p:nvSpPr>
         <p:spPr>
           <a:xfrm>
-            <a:off x="1005840" y="2971800"/>
+            <a:off x="822959" y="3200400"/>
             <a:ext cx="457200" cy="457200"/>
           </a:xfrm>
           <a:prstGeom prst="ellipse">
             <a:avLst/>
           </a:prstGeom>
-          <a:solidFill>
-            <a:srgbClr val="26C5B8"/>
-          </a:solidFill>
-          <a:ln>
-            <a:noFill/>
+          <a:noFill/>
+          <a:ln w="19050">
+            <a:solidFill>
+              <a:srgbClr val="7BEAA9"/>
+            </a:solidFill>
           </a:ln>
         </p:spPr>
         <p:txBody>
@@ -4930,7 +5136,7 @@
             <a:r>
               <a:rPr sz="1600" b="1" i="0">
                 <a:solidFill>
-                  <a:srgbClr val="FFFFFF"/>
+                  <a:srgbClr val="274935"/>
                 </a:solidFill>
               </a:rPr>
               <a:t>2</a:t>
@@ -4940,13 +5146,13 @@
       </p:sp>
       <p:sp>
         <p:nvSpPr>
-          <p:cNvPr id="11" name="TextBox 10"/>
+          <p:cNvPr id="12" name="TextBox 11"/>
           <p:cNvSpPr txBox="1"/>
           <p:nvPr/>
         </p:nvSpPr>
         <p:spPr>
           <a:xfrm>
-            <a:off x="1691640" y="2743200"/>
+            <a:off x="1508760" y="2971800"/>
             <a:ext cx="2743200" cy="914400"/>
           </a:xfrm>
           <a:prstGeom prst="rect">
@@ -4968,7 +5174,7 @@
             <a:r>
               <a:rPr sz="1800" b="1" i="0">
                 <a:solidFill>
-                  <a:srgbClr val="115F59"/>
+                  <a:srgbClr val="274935"/>
                 </a:solidFill>
               </a:rPr>
               <a:t>약속 2</a:t>
@@ -4978,14 +5184,14 @@
       </p:sp>
       <p:sp>
         <p:nvSpPr>
-          <p:cNvPr id="12" name="TextBox 11"/>
+          <p:cNvPr id="13" name="TextBox 12"/>
           <p:cNvSpPr txBox="1"/>
           <p:nvPr/>
         </p:nvSpPr>
         <p:spPr>
           <a:xfrm>
-            <a:off x="4480560" y="2743200"/>
-            <a:ext cx="6705295" cy="914400"/>
+            <a:off x="4297680" y="2971800"/>
+            <a:ext cx="7071055" cy="914400"/>
           </a:xfrm>
           <a:prstGeom prst="rect">
             <a:avLst/>
@@ -5006,7 +5212,7 @@
             <a:r>
               <a:rPr sz="1700" b="0" i="0">
                 <a:solidFill>
-                  <a:srgbClr val="2B2B2B"/>
+                  <a:srgbClr val="26231F"/>
                 </a:solidFill>
               </a:rPr>
               <a:t>화가 나도 잠자리 전엔 풀기</a:t>
@@ -5016,26 +5222,24 @@
       </p:sp>
       <p:sp>
         <p:nvSpPr>
-          <p:cNvPr id="13" name="줄 3"/>
+          <p:cNvPr id="14" name="줄 3"/>
           <p:cNvSpPr/>
           <p:nvPr/>
         </p:nvSpPr>
         <p:spPr>
           <a:xfrm>
-            <a:off x="822960" y="3840480"/>
-            <a:ext cx="10545775" cy="1005840"/>
+            <a:off x="640080" y="4069080"/>
+            <a:ext cx="10911535" cy="1005840"/>
           </a:xfrm>
           <a:prstGeom prst="roundRect">
             <a:avLst>
-              <a:gd name="adj" fmla="val 8000"/>
+              <a:gd name="adj" fmla="val 7000"/>
             </a:avLst>
           </a:prstGeom>
-          <a:solidFill>
-            <a:srgbClr val="EEFCFB"/>
-          </a:solidFill>
-          <a:ln w="12700">
+          <a:noFill/>
+          <a:ln w="15875">
             <a:solidFill>
-              <a:srgbClr val="D1FAF7"/>
+              <a:srgbClr val="7BEAA9"/>
             </a:solidFill>
           </a:ln>
         </p:spPr>
@@ -5049,23 +5253,23 @@
       </p:sp>
       <p:sp>
         <p:nvSpPr>
-          <p:cNvPr id="14" name="번호 3"/>
+          <p:cNvPr id="15" name="번호 3"/>
           <p:cNvSpPr/>
           <p:nvPr/>
         </p:nvSpPr>
         <p:spPr>
           <a:xfrm>
-            <a:off x="1005840" y="4114800"/>
+            <a:off x="822959" y="4343400"/>
             <a:ext cx="457200" cy="457200"/>
           </a:xfrm>
           <a:prstGeom prst="ellipse">
             <a:avLst/>
           </a:prstGeom>
-          <a:solidFill>
-            <a:srgbClr val="26C5B8"/>
-          </a:solidFill>
-          <a:ln>
-            <a:noFill/>
+          <a:noFill/>
+          <a:ln w="19050">
+            <a:solidFill>
+              <a:srgbClr val="7BEAA9"/>
+            </a:solidFill>
           </a:ln>
         </p:spPr>
         <p:txBody>
@@ -5082,7 +5286,7 @@
             <a:r>
               <a:rPr sz="1600" b="1" i="0">
                 <a:solidFill>
-                  <a:srgbClr val="FFFFFF"/>
+                  <a:srgbClr val="274935"/>
                 </a:solidFill>
               </a:rPr>
               <a:t>3</a:t>
@@ -5092,13 +5296,13 @@
       </p:sp>
       <p:sp>
         <p:nvSpPr>
-          <p:cNvPr id="15" name="TextBox 14"/>
+          <p:cNvPr id="16" name="TextBox 15"/>
           <p:cNvSpPr txBox="1"/>
           <p:nvPr/>
         </p:nvSpPr>
         <p:spPr>
           <a:xfrm>
-            <a:off x="1691640" y="3886200"/>
+            <a:off x="1508760" y="4114800"/>
             <a:ext cx="2743200" cy="914400"/>
           </a:xfrm>
           <a:prstGeom prst="rect">
@@ -5120,7 +5324,7 @@
             <a:r>
               <a:rPr sz="1800" b="1" i="0">
                 <a:solidFill>
-                  <a:srgbClr val="115F59"/>
+                  <a:srgbClr val="274935"/>
                 </a:solidFill>
               </a:rPr>
               <a:t>약속 3</a:t>
@@ -5130,14 +5334,14 @@
       </p:sp>
       <p:sp>
         <p:nvSpPr>
-          <p:cNvPr id="16" name="TextBox 15"/>
+          <p:cNvPr id="17" name="TextBox 16"/>
           <p:cNvSpPr txBox="1"/>
           <p:nvPr/>
         </p:nvSpPr>
         <p:spPr>
           <a:xfrm>
-            <a:off x="4480560" y="3886200"/>
-            <a:ext cx="6705295" cy="914400"/>
+            <a:off x="4297680" y="4114800"/>
+            <a:ext cx="7071055" cy="914400"/>
           </a:xfrm>
           <a:prstGeom prst="rect">
             <a:avLst/>
@@ -5158,7 +5362,7 @@
             <a:r>
               <a:rPr sz="1700" b="0" i="0">
                 <a:solidFill>
-                  <a:srgbClr val="2B2B2B"/>
+                  <a:srgbClr val="26231F"/>
                 </a:solidFill>
               </a:rPr>
               <a:t>한 달에 한 번 데이트하기</a:t>
@@ -5180,7 +5384,7 @@
     <p:bg>
       <p:bgPr>
         <a:solidFill>
-          <a:srgbClr val="EEFCFB"/>
+          <a:srgbClr val="EAFDF2"/>
         </a:solidFill>
         <a:effectLst/>
       </p:bgPr>
@@ -5200,46 +5404,86 @@
         </p:nvSpPr>
         <p:spPr>
           <a:xfrm>
-            <a:off x="256032" y="256032"/>
-            <a:ext cx="11679631" cy="6345936"/>
+            <a:off x="640080" y="566928"/>
+            <a:ext cx="64008" cy="868680"/>
+          </a:xfrm>
+          <a:prstGeom prst="roundRect">
+            <a:avLst>
+              <a:gd name="adj" fmla="val 50000"/>
+            </a:avLst>
+          </a:prstGeom>
+          <a:solidFill>
+            <a:srgbClr val="7BEAA9"/>
+          </a:solidFill>
+          <a:ln>
+            <a:noFill/>
+          </a:ln>
+        </p:spPr>
+        <p:txBody>
+          <a:bodyPr rtlCol="0" anchor="ctr"/>
+          <a:lstStyle/>
+          <a:p>
+            <a:pPr algn="ctr"/>
+          </a:p>
+        </p:txBody>
+      </p:sp>
+      <p:sp>
+        <p:nvSpPr>
+          <p:cNvPr id="4" name="상단 라벨"/>
+          <p:cNvSpPr txBox="1"/>
+          <p:nvPr/>
+        </p:nvSpPr>
+        <p:spPr>
+          <a:xfrm>
+            <a:off x="868680" y="274320"/>
+            <a:ext cx="5486400" cy="274320"/>
           </a:xfrm>
           <a:prstGeom prst="rect">
             <a:avLst/>
           </a:prstGeom>
           <a:noFill/>
-          <a:ln w="28575">
-            <a:solidFill>
-              <a:srgbClr val="26C5B8"/>
-            </a:solidFill>
-          </a:ln>
-        </p:spPr>
-        <p:txBody>
-          <a:bodyPr rtlCol="0" anchor="ctr"/>
-          <a:lstStyle/>
-          <a:p>
-            <a:pPr algn="ctr"/>
-          </a:p>
-        </p:txBody>
-      </p:sp>
-      <p:sp>
-        <p:nvSpPr>
-          <p:cNvPr id="4" name="장식"/>
+        </p:spPr>
+        <p:txBody>
+          <a:bodyPr wrap="square" lIns="54864" rIns="54864" tIns="27432" bIns="27432" anchor="ctr">
+            <a:noAutofit/>
+          </a:bodyPr>
+          <a:lstStyle/>
+          <a:p>
+            <a:pPr algn="l">
+              <a:lnSpc>
+                <a:spcPct val="115000"/>
+              </a:lnSpc>
+            </a:pPr>
+            <a:r>
+              <a:rPr sz="900" b="1" i="0" spc="250">
+                <a:solidFill>
+                  <a:srgbClr val="8E8780"/>
+                </a:solidFill>
+              </a:rPr>
+              <a:t>FAMILY ALBUM</a:t>
+            </a:r>
+          </a:p>
+        </p:txBody>
+      </p:sp>
+      <p:sp>
+        <p:nvSpPr>
+          <p:cNvPr id="5" name="포인트"/>
           <p:cNvSpPr/>
           <p:nvPr/>
         </p:nvSpPr>
         <p:spPr>
           <a:xfrm>
-            <a:off x="384048" y="384048"/>
-            <a:ext cx="11423599" cy="6089904"/>
-          </a:xfrm>
-          <a:prstGeom prst="rect">
+            <a:off x="11167567" y="667512"/>
+            <a:ext cx="310896" cy="310896"/>
+          </a:xfrm>
+          <a:prstGeom prst="ellipse">
             <a:avLst/>
           </a:prstGeom>
-          <a:noFill/>
-          <a:ln w="9525">
-            <a:solidFill>
-              <a:srgbClr val="D1FAF7"/>
-            </a:solidFill>
+          <a:solidFill>
+            <a:srgbClr val="A5F3C5"/>
+          </a:solidFill>
+          <a:ln>
+            <a:noFill/>
           </a:ln>
         </p:spPr>
         <p:txBody>
@@ -5262,8 +5506,8 @@
         </p:nvSpPr>
         <p:spPr>
           <a:xfrm>
-            <a:off x="822960" y="548640"/>
-            <a:ext cx="9265615" cy="822960"/>
+            <a:off x="868680" y="566928"/>
+            <a:ext cx="9448495" cy="868680"/>
           </a:xfrm>
         </p:spPr>
         <p:txBody>
@@ -5280,7 +5524,7 @@
             <a:r>
               <a:rPr sz="3000" b="1" i="0">
                 <a:solidFill>
-                  <a:srgbClr val="115F59"/>
+                  <a:srgbClr val="26231F"/>
                 </a:solidFill>
               </a:rPr>
               <a:t>가족 사진</a:t>
@@ -5290,14 +5534,14 @@
       </p:sp>
       <p:sp>
         <p:nvSpPr>
-          <p:cNvPr id="5" name="사진 자리"/>
+          <p:cNvPr id="6" name="사진 자리"/>
           <p:cNvSpPr/>
           <p:nvPr/>
         </p:nvSpPr>
         <p:spPr>
           <a:xfrm>
-            <a:off x="822960" y="1554480"/>
-            <a:ext cx="3393338" cy="2217420"/>
+            <a:off x="640080" y="1783080"/>
+            <a:ext cx="3515258" cy="2194560"/>
           </a:xfrm>
           <a:prstGeom prst="roundRect">
             <a:avLst>
@@ -5305,12 +5549,10 @@
             </a:avLst>
           </a:prstGeom>
           <a:solidFill>
-            <a:srgbClr val="D1FAF7"/>
+            <a:srgbClr val="D1FAE2"/>
           </a:solidFill>
           <a:ln w="19050">
-            <a:solidFill>
-              <a:srgbClr val="26C5B8"/>
-            </a:solidFill>
+            <a:noFill/>
             <a:prstDash val="dash"/>
           </a:ln>
         </p:spPr>
@@ -5328,7 +5570,7 @@
             <a:r>
               <a:rPr sz="1200" b="0" i="0">
                 <a:solidFill>
-                  <a:srgbClr val="115F59"/>
+                  <a:srgbClr val="8E8780"/>
                 </a:solidFill>
               </a:rPr>
               <a:t>사진 1</a:t>
@@ -5338,14 +5580,14 @@
       </p:sp>
       <p:sp>
         <p:nvSpPr>
-          <p:cNvPr id="6" name="사진 자리"/>
+          <p:cNvPr id="7" name="사진 자리"/>
           <p:cNvSpPr/>
           <p:nvPr/>
         </p:nvSpPr>
         <p:spPr>
           <a:xfrm>
-            <a:off x="4399178" y="1554480"/>
-            <a:ext cx="3393338" cy="2217420"/>
+            <a:off x="4338218" y="1783080"/>
+            <a:ext cx="3515258" cy="2194560"/>
           </a:xfrm>
           <a:prstGeom prst="roundRect">
             <a:avLst>
@@ -5353,12 +5595,10 @@
             </a:avLst>
           </a:prstGeom>
           <a:solidFill>
-            <a:srgbClr val="D1FAF7"/>
+            <a:srgbClr val="D1FAE2"/>
           </a:solidFill>
           <a:ln w="19050">
-            <a:solidFill>
-              <a:srgbClr val="26C5B8"/>
-            </a:solidFill>
+            <a:noFill/>
             <a:prstDash val="dash"/>
           </a:ln>
         </p:spPr>
@@ -5376,7 +5616,7 @@
             <a:r>
               <a:rPr sz="1200" b="0" i="0">
                 <a:solidFill>
-                  <a:srgbClr val="115F59"/>
+                  <a:srgbClr val="8E8780"/>
                 </a:solidFill>
               </a:rPr>
               <a:t>사진 2</a:t>
@@ -5386,14 +5626,14 @@
       </p:sp>
       <p:sp>
         <p:nvSpPr>
-          <p:cNvPr id="7" name="사진 자리"/>
+          <p:cNvPr id="8" name="사진 자리"/>
           <p:cNvSpPr/>
           <p:nvPr/>
         </p:nvSpPr>
         <p:spPr>
           <a:xfrm>
-            <a:off x="7975396" y="1554480"/>
-            <a:ext cx="3393338" cy="2217420"/>
+            <a:off x="8036356" y="1783080"/>
+            <a:ext cx="3515258" cy="2194560"/>
           </a:xfrm>
           <a:prstGeom prst="roundRect">
             <a:avLst>
@@ -5401,12 +5641,10 @@
             </a:avLst>
           </a:prstGeom>
           <a:solidFill>
-            <a:srgbClr val="D1FAF7"/>
+            <a:srgbClr val="D1FAE2"/>
           </a:solidFill>
           <a:ln w="19050">
-            <a:solidFill>
-              <a:srgbClr val="26C5B8"/>
-            </a:solidFill>
+            <a:noFill/>
             <a:prstDash val="dash"/>
           </a:ln>
         </p:spPr>
@@ -5424,7 +5662,7 @@
             <a:r>
               <a:rPr sz="1200" b="0" i="0">
                 <a:solidFill>
-                  <a:srgbClr val="115F59"/>
+                  <a:srgbClr val="8E8780"/>
                 </a:solidFill>
               </a:rPr>
               <a:t>사진 3</a:t>
@@ -5434,14 +5672,14 @@
       </p:sp>
       <p:sp>
         <p:nvSpPr>
-          <p:cNvPr id="8" name="사진 자리"/>
+          <p:cNvPr id="9" name="사진 자리"/>
           <p:cNvSpPr/>
           <p:nvPr/>
         </p:nvSpPr>
         <p:spPr>
           <a:xfrm>
-            <a:off x="822960" y="3954780"/>
-            <a:ext cx="3393338" cy="2217420"/>
+            <a:off x="640080" y="4160520"/>
+            <a:ext cx="3515258" cy="2194560"/>
           </a:xfrm>
           <a:prstGeom prst="roundRect">
             <a:avLst>
@@ -5449,12 +5687,10 @@
             </a:avLst>
           </a:prstGeom>
           <a:solidFill>
-            <a:srgbClr val="D1FAF7"/>
+            <a:srgbClr val="D1FAE2"/>
           </a:solidFill>
           <a:ln w="19050">
-            <a:solidFill>
-              <a:srgbClr val="26C5B8"/>
-            </a:solidFill>
+            <a:noFill/>
             <a:prstDash val="dash"/>
           </a:ln>
         </p:spPr>
@@ -5472,7 +5708,7 @@
             <a:r>
               <a:rPr sz="1200" b="0" i="0">
                 <a:solidFill>
-                  <a:srgbClr val="115F59"/>
+                  <a:srgbClr val="8E8780"/>
                 </a:solidFill>
               </a:rPr>
               <a:t>사진 4</a:t>
@@ -5482,14 +5718,14 @@
       </p:sp>
       <p:sp>
         <p:nvSpPr>
-          <p:cNvPr id="9" name="사진 자리"/>
+          <p:cNvPr id="10" name="사진 자리"/>
           <p:cNvSpPr/>
           <p:nvPr/>
         </p:nvSpPr>
         <p:spPr>
           <a:xfrm>
-            <a:off x="4399178" y="3954780"/>
-            <a:ext cx="3393338" cy="2217420"/>
+            <a:off x="4338218" y="4160520"/>
+            <a:ext cx="3515258" cy="2194560"/>
           </a:xfrm>
           <a:prstGeom prst="roundRect">
             <a:avLst>
@@ -5497,12 +5733,10 @@
             </a:avLst>
           </a:prstGeom>
           <a:solidFill>
-            <a:srgbClr val="D1FAF7"/>
+            <a:srgbClr val="D1FAE2"/>
           </a:solidFill>
           <a:ln w="19050">
-            <a:solidFill>
-              <a:srgbClr val="26C5B8"/>
-            </a:solidFill>
+            <a:noFill/>
             <a:prstDash val="dash"/>
           </a:ln>
         </p:spPr>
@@ -5520,7 +5754,7 @@
             <a:r>
               <a:rPr sz="1200" b="0" i="0">
                 <a:solidFill>
-                  <a:srgbClr val="115F59"/>
+                  <a:srgbClr val="8E8780"/>
                 </a:solidFill>
               </a:rPr>
               <a:t>사진 5</a:t>
@@ -5530,14 +5764,14 @@
       </p:sp>
       <p:sp>
         <p:nvSpPr>
-          <p:cNvPr id="10" name="사진 자리"/>
+          <p:cNvPr id="11" name="사진 자리"/>
           <p:cNvSpPr/>
           <p:nvPr/>
         </p:nvSpPr>
         <p:spPr>
           <a:xfrm>
-            <a:off x="7975396" y="3954780"/>
-            <a:ext cx="3393338" cy="2217420"/>
+            <a:off x="8036356" y="4160520"/>
+            <a:ext cx="3515258" cy="2194560"/>
           </a:xfrm>
           <a:prstGeom prst="roundRect">
             <a:avLst>
@@ -5545,12 +5779,10 @@
             </a:avLst>
           </a:prstGeom>
           <a:solidFill>
-            <a:srgbClr val="D1FAF7"/>
+            <a:srgbClr val="D1FAE2"/>
           </a:solidFill>
           <a:ln w="19050">
-            <a:solidFill>
-              <a:srgbClr val="26C5B8"/>
-            </a:solidFill>
+            <a:noFill/>
             <a:prstDash val="dash"/>
           </a:ln>
         </p:spPr>
@@ -5568,7 +5800,7 @@
             <a:r>
               <a:rPr sz="1200" b="0" i="0">
                 <a:solidFill>
-                  <a:srgbClr val="115F59"/>
+                  <a:srgbClr val="8E8780"/>
                 </a:solidFill>
               </a:rPr>
               <a:t>사진 6</a:t>
@@ -5587,6 +5819,14 @@
 <file path=ppt/slides/slide6.xml><?xml version="1.0" encoding="utf-8"?>
 <p:sld xmlns:a="http://schemas.openxmlformats.org/drawingml/2006/main" xmlns:p="http://schemas.openxmlformats.org/presentationml/2006/main" xmlns:r="http://schemas.openxmlformats.org/officeDocument/2006/relationships">
   <p:cSld>
+    <p:bg>
+      <p:bgPr>
+        <a:solidFill>
+          <a:srgbClr val="EAFDF2"/>
+        </a:solidFill>
+        <a:effectLst/>
+      </p:bgPr>
+    </p:bg>
     <p:spTree>
       <p:nvGrpSpPr>
         <p:cNvPr id="1" name=""/>
@@ -5594,30 +5834,116 @@
         <p:nvPr/>
       </p:nvGrpSpPr>
       <p:grpSpPr/>
-      <p:pic>
-        <p:nvPicPr>
-          <p:cNvPr id="3" name="표지 그림" descr="family-16.jpg"/>
-          <p:cNvPicPr>
-            <a:picLocks noChangeAspect="1"/>
-          </p:cNvPicPr>
+      <p:sp>
+        <p:nvSpPr>
+          <p:cNvPr id="3" name="사진 자리"/>
+          <p:cNvSpPr/>
           <p:nvPr/>
-        </p:nvPicPr>
-        <p:blipFill>
-          <a:blip r:embed="rId2"/>
-          <a:stretch>
-            <a:fillRect/>
-          </a:stretch>
-        </p:blipFill>
-        <p:spPr>
-          <a:xfrm>
-            <a:off x="0" y="0"/>
-            <a:ext cx="12191695" cy="6858000"/>
+        </p:nvSpPr>
+        <p:spPr>
+          <a:xfrm>
+            <a:off x="7802684" y="0"/>
+            <a:ext cx="4389010" cy="6858000"/>
           </a:xfrm>
           <a:prstGeom prst="rect">
             <a:avLst/>
           </a:prstGeom>
-        </p:spPr>
-      </p:pic>
+          <a:solidFill>
+            <a:srgbClr val="A5F3C5"/>
+          </a:solidFill>
+          <a:ln>
+            <a:noFill/>
+          </a:ln>
+        </p:spPr>
+        <p:txBody>
+          <a:bodyPr rtlCol="0" anchor="ctr" wrap="square" lIns="54864" rIns="54864" tIns="27432" bIns="27432">
+            <a:noAutofit/>
+          </a:bodyPr>
+          <a:lstStyle/>
+          <a:p>
+            <a:pPr algn="ctr">
+              <a:lnSpc>
+                <a:spcPct val="100000"/>
+              </a:lnSpc>
+            </a:pPr>
+            <a:r>
+              <a:rPr sz="1400" b="0" i="0">
+                <a:solidFill>
+                  <a:srgbClr val="274935"/>
+                </a:solidFill>
+              </a:rPr>
+              <a:t>사진을 넣어 주세요</a:t>
+            </a:r>
+          </a:p>
+        </p:txBody>
+      </p:sp>
+      <p:sp>
+        <p:nvSpPr>
+          <p:cNvPr id="4" name="장식"/>
+          <p:cNvSpPr/>
+          <p:nvPr/>
+        </p:nvSpPr>
+        <p:spPr>
+          <a:xfrm>
+            <a:off x="8168435" y="365760"/>
+            <a:ext cx="3657508" cy="6126480"/>
+          </a:xfrm>
+          <a:prstGeom prst="rect">
+            <a:avLst/>
+          </a:prstGeom>
+          <a:noFill/>
+          <a:ln w="9525">
+            <a:solidFill>
+              <a:srgbClr val="26231F"/>
+            </a:solidFill>
+          </a:ln>
+        </p:spPr>
+        <p:txBody>
+          <a:bodyPr rtlCol="0" anchor="ctr"/>
+          <a:lstStyle/>
+          <a:p>
+            <a:pPr algn="ctr"/>
+          </a:p>
+        </p:txBody>
+      </p:sp>
+      <p:sp>
+        <p:nvSpPr>
+          <p:cNvPr id="5" name="라벨"/>
+          <p:cNvSpPr txBox="1"/>
+          <p:nvPr/>
+        </p:nvSpPr>
+        <p:spPr>
+          <a:xfrm>
+            <a:off x="822960" y="2148840"/>
+            <a:ext cx="5608179" cy="274320"/>
+          </a:xfrm>
+          <a:prstGeom prst="rect">
+            <a:avLst/>
+          </a:prstGeom>
+          <a:noFill/>
+        </p:spPr>
+        <p:txBody>
+          <a:bodyPr wrap="square" lIns="54864" rIns="54864" tIns="27432" bIns="27432" anchor="t">
+            <a:noAutofit/>
+          </a:bodyPr>
+          <a:lstStyle/>
+          <a:p>
+            <a:pPr algn="l">
+              <a:lnSpc>
+                <a:spcPct val="115000"/>
+              </a:lnSpc>
+            </a:pPr>
+            <a:r>
+              <a:rPr sz="1000" b="1" i="0" spc="250">
+                <a:solidFill>
+                  <a:srgbClr val="26231F"/>
+                </a:solidFill>
+              </a:rPr>
+              <a:t>FAMILY ALBUM</a:t>
+            </a:r>
+          </a:p>
+        </p:txBody>
+      </p:sp>
       <p:sp>
         <p:nvSpPr>
           <p:cNvPr id="2" name="Title 1"/>
@@ -5630,8 +5956,8 @@
         </p:nvSpPr>
         <p:spPr>
           <a:xfrm>
-            <a:off x="853418" y="2057400"/>
-            <a:ext cx="6095847" cy="1554480"/>
+            <a:off x="822960" y="2606040"/>
+            <a:ext cx="5608179" cy="1188720"/>
           </a:xfrm>
         </p:spPr>
         <p:txBody>
@@ -5646,9 +5972,9 @@
               </a:lnSpc>
             </a:pPr>
             <a:r>
-              <a:rPr sz="3600" b="1" i="0">
-                <a:solidFill>
-                  <a:srgbClr val="115F59"/>
+              <a:rPr sz="4000" b="1" i="0">
+                <a:solidFill>
+                  <a:srgbClr val="26231F"/>
                 </a:solidFill>
               </a:rPr>
               <a:t>우리 가족 소개를 마칩니다</a:t>
@@ -5658,14 +5984,14 @@
       </p:sp>
       <p:sp>
         <p:nvSpPr>
-          <p:cNvPr id="4" name="한 줄 문구"/>
+          <p:cNvPr id="6" name="한 줄 문구"/>
           <p:cNvSpPr txBox="1"/>
           <p:nvPr/>
         </p:nvSpPr>
         <p:spPr>
           <a:xfrm>
-            <a:off x="853418" y="3749039"/>
-            <a:ext cx="6095847" cy="822960"/>
+            <a:off x="822960" y="3886200"/>
+            <a:ext cx="5608179" cy="822960"/>
           </a:xfrm>
           <a:prstGeom prst="rect">
             <a:avLst/>
@@ -5684,9 +6010,9 @@
               </a:lnSpc>
             </a:pPr>
             <a:r>
-              <a:rPr sz="1700" b="0" i="1">
-                <a:solidFill>
-                  <a:srgbClr val="115F59"/>
+              <a:rPr sz="1700" b="0" i="0">
+                <a:solidFill>
+                  <a:srgbClr val="26231F"/>
                 </a:solidFill>
               </a:rPr>
               <a:t>읽어 주셔서 고맙습니다</a:t>
@@ -5696,14 +6022,14 @@
       </p:sp>
       <p:sp>
         <p:nvSpPr>
-          <p:cNvPr id="5" name="안내 문구"/>
+          <p:cNvPr id="7" name="안내 문구"/>
           <p:cNvSpPr txBox="1"/>
           <p:nvPr/>
         </p:nvSpPr>
         <p:spPr>
           <a:xfrm>
-            <a:off x="853418" y="4617720"/>
-            <a:ext cx="6095847" cy="914400"/>
+            <a:off x="822960" y="4754880"/>
+            <a:ext cx="5608179" cy="914400"/>
           </a:xfrm>
           <a:prstGeom prst="rect">
             <a:avLst/>
@@ -5724,7 +6050,7 @@
             <a:r>
               <a:rPr sz="1400" b="0" i="0">
                 <a:solidFill>
-                  <a:srgbClr val="666666"/>
+                  <a:srgbClr val="26231F"/>
                 </a:solidFill>
               </a:rPr>
               <a:t>고맙습니다 · 가족 이름</a:t>
@@ -5751,34 +6077,34 @@
         <a:sysClr val="window" lastClr="FFFFFF"/>
       </a:lt1>
       <a:dk2>
-        <a:srgbClr val="115F59"/>
+        <a:srgbClr val="274935"/>
       </a:dk2>
       <a:lt2>
-        <a:srgbClr val="EEFCFB"/>
+        <a:srgbClr val="EAFDF2"/>
       </a:lt2>
       <a:accent1>
-        <a:srgbClr val="26C5B8"/>
+        <a:srgbClr val="7BEAA9"/>
       </a:accent1>
       <a:accent2>
-        <a:srgbClr val="209DB6"/>
+        <a:srgbClr val="9FEFE6"/>
       </a:accent2>
       <a:accent3>
-        <a:srgbClr val="115F59"/>
+        <a:srgbClr val="274935"/>
       </a:accent3>
       <a:accent4>
-        <a:srgbClr val="D1FAF7"/>
+        <a:srgbClr val="D1FAE2"/>
       </a:accent4>
       <a:accent5>
-        <a:srgbClr val="23B1B7"/>
+        <a:srgbClr val="8DECC8"/>
       </a:accent5>
       <a:accent6>
-        <a:srgbClr val="709F9B"/>
+        <a:srgbClr val="7D9286"/>
       </a:accent6>
       <a:hlink>
-        <a:srgbClr val="26C5B8"/>
+        <a:srgbClr val="7BEAA9"/>
       </a:hlink>
       <a:folHlink>
-        <a:srgbClr val="115F59"/>
+        <a:srgbClr val="274935"/>
       </a:folHlink>
     </a:clrScheme>
     <a:fontScheme name="Office">
